--- a/docs/pptx/whole/ritu-linsubhr-ratio-grade2.pptx
+++ b/docs/pptx/whole/ritu-linsubhr-ratio-grade2.pptx
@@ -2443,7 +2443,7 @@
           </p:nvSpPr>
           <p:spPr>
             <a:xfrm>
-              <a:off x="1424129" y="2073503"/>
+              <a:off x="1425728" y="2073503"/>
               <a:ext cx="0" cy="3649639"/>
             </a:xfrm>
             <a:custGeom>
@@ -2486,7 +2486,7 @@
           </p:nvSpPr>
           <p:spPr>
             <a:xfrm>
-              <a:off x="3298684" y="2073503"/>
+              <a:off x="3298283" y="2073503"/>
               <a:ext cx="0" cy="3649639"/>
             </a:xfrm>
             <a:custGeom>
@@ -2529,7 +2529,7 @@
           </p:nvSpPr>
           <p:spPr>
             <a:xfrm>
-              <a:off x="5173239" y="2073503"/>
+              <a:off x="5170839" y="2073503"/>
               <a:ext cx="0" cy="3649639"/>
             </a:xfrm>
             <a:custGeom>
@@ -2572,7 +2572,7 @@
           </p:nvSpPr>
           <p:spPr>
             <a:xfrm>
-              <a:off x="7047795" y="2073503"/>
+              <a:off x="7043395" y="2073503"/>
               <a:ext cx="0" cy="3649639"/>
             </a:xfrm>
             <a:custGeom>
@@ -2830,7 +2830,7 @@
           </p:nvSpPr>
           <p:spPr>
             <a:xfrm>
-              <a:off x="2361407" y="2073503"/>
+              <a:off x="2362006" y="2073503"/>
               <a:ext cx="0" cy="3649639"/>
             </a:xfrm>
             <a:custGeom>
@@ -2873,7 +2873,7 @@
           </p:nvSpPr>
           <p:spPr>
             <a:xfrm>
-              <a:off x="4235962" y="2073503"/>
+              <a:off x="4234561" y="2073503"/>
               <a:ext cx="0" cy="3649639"/>
             </a:xfrm>
             <a:custGeom>
@@ -2916,7 +2916,7 @@
           </p:nvSpPr>
           <p:spPr>
             <a:xfrm>
-              <a:off x="6110517" y="2073503"/>
+              <a:off x="6107117" y="2073503"/>
               <a:ext cx="0" cy="3649639"/>
             </a:xfrm>
             <a:custGeom>
@@ -2959,7 +2959,7 @@
           </p:nvSpPr>
           <p:spPr>
             <a:xfrm>
-              <a:off x="7985072" y="2073503"/>
+              <a:off x="7979673" y="2073503"/>
               <a:ext cx="0" cy="3649639"/>
             </a:xfrm>
             <a:custGeom>
@@ -3003,605 +3003,605 @@
           <p:spPr>
             <a:xfrm>
               <a:off x="1172049" y="2073503"/>
-              <a:ext cx="7090630" cy="3358693"/>
+              <a:ext cx="7090630" cy="3360601"/>
             </a:xfrm>
             <a:custGeom>
               <a:avLst/>
               <a:pathLst>
-                <a:path w="7090630" h="3358693">
+                <a:path w="7090630" h="3360601">
                   <a:moveTo>
-                    <a:pt x="146387" y="0"/>
+                    <a:pt x="171213" y="0"/>
                   </a:moveTo>
                   <a:lnTo>
-                    <a:pt x="214867" y="112528"/>
-                  </a:lnTo>
-                  <a:lnTo>
-                    <a:pt x="286490" y="226251"/>
-                  </a:lnTo>
-                  <a:lnTo>
-                    <a:pt x="358112" y="336137"/>
-                  </a:lnTo>
-                  <a:lnTo>
-                    <a:pt x="429735" y="442317"/>
-                  </a:lnTo>
-                  <a:lnTo>
-                    <a:pt x="501357" y="544914"/>
-                  </a:lnTo>
-                  <a:lnTo>
-                    <a:pt x="572980" y="644051"/>
-                  </a:lnTo>
-                  <a:lnTo>
-                    <a:pt x="644602" y="739844"/>
-                  </a:lnTo>
-                  <a:lnTo>
-                    <a:pt x="716225" y="832405"/>
-                  </a:lnTo>
-                  <a:lnTo>
-                    <a:pt x="787847" y="921844"/>
-                  </a:lnTo>
-                  <a:lnTo>
-                    <a:pt x="859470" y="1008265"/>
-                  </a:lnTo>
-                  <a:lnTo>
-                    <a:pt x="931092" y="1091772"/>
-                  </a:lnTo>
-                  <a:lnTo>
-                    <a:pt x="1002715" y="1172461"/>
-                  </a:lnTo>
-                  <a:lnTo>
-                    <a:pt x="1074337" y="1250429"/>
-                  </a:lnTo>
-                  <a:lnTo>
-                    <a:pt x="1145960" y="1325766"/>
-                  </a:lnTo>
-                  <a:lnTo>
-                    <a:pt x="1217582" y="1398562"/>
-                  </a:lnTo>
-                  <a:lnTo>
-                    <a:pt x="1289205" y="1468903"/>
-                  </a:lnTo>
-                  <a:lnTo>
-                    <a:pt x="1360827" y="1536870"/>
-                  </a:lnTo>
-                  <a:lnTo>
-                    <a:pt x="1432450" y="1602545"/>
-                  </a:lnTo>
-                  <a:lnTo>
-                    <a:pt x="1504073" y="1666004"/>
-                  </a:lnTo>
-                  <a:lnTo>
-                    <a:pt x="1575695" y="1727323"/>
-                  </a:lnTo>
-                  <a:lnTo>
-                    <a:pt x="1647318" y="1786573"/>
-                  </a:lnTo>
-                  <a:lnTo>
-                    <a:pt x="1718940" y="1843824"/>
-                  </a:lnTo>
-                  <a:lnTo>
-                    <a:pt x="1790563" y="1899144"/>
-                  </a:lnTo>
-                  <a:lnTo>
-                    <a:pt x="1862185" y="1952598"/>
-                  </a:lnTo>
-                  <a:lnTo>
-                    <a:pt x="1933808" y="2004249"/>
-                  </a:lnTo>
-                  <a:lnTo>
-                    <a:pt x="2005430" y="2054158"/>
-                  </a:lnTo>
-                  <a:lnTo>
-                    <a:pt x="2077053" y="2102383"/>
-                  </a:lnTo>
-                  <a:lnTo>
-                    <a:pt x="2148675" y="2148981"/>
-                  </a:lnTo>
-                  <a:lnTo>
-                    <a:pt x="2220298" y="2194007"/>
-                  </a:lnTo>
-                  <a:lnTo>
-                    <a:pt x="2291920" y="2237514"/>
-                  </a:lnTo>
-                  <a:lnTo>
-                    <a:pt x="2363543" y="2279554"/>
-                  </a:lnTo>
-                  <a:lnTo>
-                    <a:pt x="2435165" y="2320175"/>
-                  </a:lnTo>
-                  <a:lnTo>
-                    <a:pt x="2506788" y="2359427"/>
-                  </a:lnTo>
-                  <a:lnTo>
-                    <a:pt x="2578410" y="2397354"/>
-                  </a:lnTo>
-                  <a:lnTo>
-                    <a:pt x="2650033" y="2434001"/>
-                  </a:lnTo>
-                  <a:lnTo>
-                    <a:pt x="2721655" y="2469413"/>
-                  </a:lnTo>
-                  <a:lnTo>
-                    <a:pt x="2793278" y="2503630"/>
-                  </a:lnTo>
-                  <a:lnTo>
-                    <a:pt x="2864901" y="2536692"/>
-                  </a:lnTo>
-                  <a:lnTo>
-                    <a:pt x="2936523" y="2568640"/>
-                  </a:lnTo>
-                  <a:lnTo>
-                    <a:pt x="3008146" y="2599509"/>
-                  </a:lnTo>
-                  <a:lnTo>
-                    <a:pt x="3079768" y="2629338"/>
-                  </a:lnTo>
-                  <a:lnTo>
-                    <a:pt x="3151391" y="2655785"/>
-                  </a:lnTo>
-                  <a:lnTo>
-                    <a:pt x="3223013" y="2666708"/>
-                  </a:lnTo>
-                  <a:lnTo>
-                    <a:pt x="3294636" y="2677487"/>
-                  </a:lnTo>
-                  <a:lnTo>
-                    <a:pt x="3366258" y="2688124"/>
-                  </a:lnTo>
-                  <a:lnTo>
-                    <a:pt x="3437881" y="2698620"/>
-                  </a:lnTo>
-                  <a:lnTo>
-                    <a:pt x="3509503" y="2708977"/>
-                  </a:lnTo>
-                  <a:lnTo>
-                    <a:pt x="3581126" y="2719199"/>
-                  </a:lnTo>
-                  <a:lnTo>
-                    <a:pt x="3652748" y="2729285"/>
-                  </a:lnTo>
-                  <a:lnTo>
-                    <a:pt x="3724371" y="2739238"/>
-                  </a:lnTo>
-                  <a:lnTo>
-                    <a:pt x="3795993" y="2749060"/>
-                  </a:lnTo>
-                  <a:lnTo>
-                    <a:pt x="3867616" y="2758752"/>
-                  </a:lnTo>
-                  <a:lnTo>
-                    <a:pt x="3939238" y="2768317"/>
-                  </a:lnTo>
-                  <a:lnTo>
-                    <a:pt x="4010861" y="2777755"/>
-                  </a:lnTo>
-                  <a:lnTo>
-                    <a:pt x="4082483" y="2787069"/>
-                  </a:lnTo>
-                  <a:lnTo>
-                    <a:pt x="4154106" y="2796259"/>
-                  </a:lnTo>
-                  <a:lnTo>
-                    <a:pt x="4225729" y="2805329"/>
-                  </a:lnTo>
-                  <a:lnTo>
-                    <a:pt x="4297351" y="2814279"/>
-                  </a:lnTo>
-                  <a:lnTo>
-                    <a:pt x="4368974" y="2823111"/>
-                  </a:lnTo>
-                  <a:lnTo>
-                    <a:pt x="4440596" y="2831826"/>
-                  </a:lnTo>
-                  <a:lnTo>
-                    <a:pt x="4512219" y="2840427"/>
-                  </a:lnTo>
-                  <a:lnTo>
-                    <a:pt x="4583841" y="2848914"/>
-                  </a:lnTo>
-                  <a:lnTo>
-                    <a:pt x="4655464" y="2857289"/>
-                  </a:lnTo>
-                  <a:lnTo>
-                    <a:pt x="4727086" y="2865553"/>
-                  </a:lnTo>
-                  <a:lnTo>
-                    <a:pt x="4798709" y="2873709"/>
-                  </a:lnTo>
-                  <a:lnTo>
-                    <a:pt x="4870331" y="2881757"/>
-                  </a:lnTo>
-                  <a:lnTo>
-                    <a:pt x="4941954" y="2889698"/>
-                  </a:lnTo>
-                  <a:lnTo>
-                    <a:pt x="5013576" y="2897535"/>
-                  </a:lnTo>
-                  <a:lnTo>
-                    <a:pt x="5085199" y="2905269"/>
-                  </a:lnTo>
-                  <a:lnTo>
-                    <a:pt x="5156821" y="2912900"/>
-                  </a:lnTo>
-                  <a:lnTo>
-                    <a:pt x="5228444" y="2920431"/>
-                  </a:lnTo>
-                  <a:lnTo>
-                    <a:pt x="5300066" y="2927863"/>
-                  </a:lnTo>
-                  <a:lnTo>
-                    <a:pt x="5371689" y="2935196"/>
-                  </a:lnTo>
-                  <a:lnTo>
-                    <a:pt x="5443311" y="2942433"/>
-                  </a:lnTo>
-                  <a:lnTo>
-                    <a:pt x="5514934" y="2949574"/>
-                  </a:lnTo>
-                  <a:lnTo>
-                    <a:pt x="5586557" y="2956621"/>
-                  </a:lnTo>
-                  <a:lnTo>
-                    <a:pt x="5658179" y="2963575"/>
-                  </a:lnTo>
-                  <a:lnTo>
-                    <a:pt x="5729802" y="2970438"/>
-                  </a:lnTo>
-                  <a:lnTo>
-                    <a:pt x="5801424" y="2977209"/>
-                  </a:lnTo>
-                  <a:lnTo>
-                    <a:pt x="5873047" y="2983892"/>
-                  </a:lnTo>
-                  <a:lnTo>
-                    <a:pt x="5944669" y="2990486"/>
-                  </a:lnTo>
-                  <a:lnTo>
-                    <a:pt x="6016292" y="2996993"/>
-                  </a:lnTo>
-                  <a:lnTo>
-                    <a:pt x="6087914" y="3003415"/>
-                  </a:lnTo>
-                  <a:lnTo>
-                    <a:pt x="6159537" y="3009752"/>
-                  </a:lnTo>
-                  <a:lnTo>
-                    <a:pt x="6231159" y="3016005"/>
-                  </a:lnTo>
-                  <a:lnTo>
-                    <a:pt x="6302782" y="3022175"/>
-                  </a:lnTo>
-                  <a:lnTo>
-                    <a:pt x="6374404" y="3028265"/>
-                  </a:lnTo>
-                  <a:lnTo>
-                    <a:pt x="6446027" y="3034274"/>
-                  </a:lnTo>
-                  <a:lnTo>
-                    <a:pt x="6517649" y="3040203"/>
-                  </a:lnTo>
-                  <a:lnTo>
-                    <a:pt x="6589272" y="3046055"/>
-                  </a:lnTo>
-                  <a:lnTo>
-                    <a:pt x="6660894" y="3051829"/>
-                  </a:lnTo>
-                  <a:lnTo>
-                    <a:pt x="6732517" y="3057527"/>
-                  </a:lnTo>
-                  <a:lnTo>
-                    <a:pt x="6804139" y="3063150"/>
-                  </a:lnTo>
-                  <a:lnTo>
-                    <a:pt x="6875762" y="3068698"/>
-                  </a:lnTo>
-                  <a:lnTo>
-                    <a:pt x="6947385" y="3074174"/>
-                  </a:lnTo>
-                  <a:lnTo>
-                    <a:pt x="7019007" y="3079577"/>
-                  </a:lnTo>
-                  <a:lnTo>
-                    <a:pt x="7090630" y="3084909"/>
-                  </a:lnTo>
-                  <a:lnTo>
-                    <a:pt x="7090630" y="3358693"/>
-                  </a:lnTo>
-                  <a:lnTo>
-                    <a:pt x="7019007" y="3354327"/>
-                  </a:lnTo>
-                  <a:lnTo>
-                    <a:pt x="6947385" y="3349809"/>
-                  </a:lnTo>
-                  <a:lnTo>
-                    <a:pt x="6875762" y="3345133"/>
-                  </a:lnTo>
-                  <a:lnTo>
-                    <a:pt x="6804139" y="3340294"/>
-                  </a:lnTo>
-                  <a:lnTo>
-                    <a:pt x="6732517" y="3335286"/>
-                  </a:lnTo>
-                  <a:lnTo>
-                    <a:pt x="6660894" y="3330103"/>
-                  </a:lnTo>
-                  <a:lnTo>
-                    <a:pt x="6589272" y="3324739"/>
-                  </a:lnTo>
-                  <a:lnTo>
-                    <a:pt x="6517649" y="3319188"/>
-                  </a:lnTo>
-                  <a:lnTo>
-                    <a:pt x="6446027" y="3313443"/>
-                  </a:lnTo>
-                  <a:lnTo>
-                    <a:pt x="6374404" y="3307498"/>
-                  </a:lnTo>
-                  <a:lnTo>
-                    <a:pt x="6302782" y="3301345"/>
-                  </a:lnTo>
-                  <a:lnTo>
-                    <a:pt x="6231159" y="3294977"/>
-                  </a:lnTo>
-                  <a:lnTo>
-                    <a:pt x="6159537" y="3288387"/>
-                  </a:lnTo>
-                  <a:lnTo>
-                    <a:pt x="6087914" y="3281566"/>
-                  </a:lnTo>
-                  <a:lnTo>
-                    <a:pt x="6016292" y="3274508"/>
-                  </a:lnTo>
-                  <a:lnTo>
-                    <a:pt x="5944669" y="3267203"/>
-                  </a:lnTo>
-                  <a:lnTo>
-                    <a:pt x="5873047" y="3259644"/>
-                  </a:lnTo>
-                  <a:lnTo>
-                    <a:pt x="5801424" y="3251820"/>
-                  </a:lnTo>
-                  <a:lnTo>
-                    <a:pt x="5729802" y="3243723"/>
-                  </a:lnTo>
-                  <a:lnTo>
-                    <a:pt x="5658179" y="3235344"/>
-                  </a:lnTo>
-                  <a:lnTo>
-                    <a:pt x="5586557" y="3226672"/>
-                  </a:lnTo>
-                  <a:lnTo>
-                    <a:pt x="5514934" y="3217697"/>
-                  </a:lnTo>
-                  <a:lnTo>
-                    <a:pt x="5443311" y="3208409"/>
-                  </a:lnTo>
-                  <a:lnTo>
-                    <a:pt x="5371689" y="3198796"/>
-                  </a:lnTo>
-                  <a:lnTo>
-                    <a:pt x="5300066" y="3188849"/>
-                  </a:lnTo>
-                  <a:lnTo>
-                    <a:pt x="5228444" y="3178553"/>
-                  </a:lnTo>
-                  <a:lnTo>
-                    <a:pt x="5156821" y="3167899"/>
-                  </a:lnTo>
-                  <a:lnTo>
-                    <a:pt x="5085199" y="3156872"/>
-                  </a:lnTo>
-                  <a:lnTo>
-                    <a:pt x="5013576" y="3145461"/>
-                  </a:lnTo>
-                  <a:lnTo>
-                    <a:pt x="4941954" y="3133651"/>
-                  </a:lnTo>
-                  <a:lnTo>
-                    <a:pt x="4870331" y="3121428"/>
-                  </a:lnTo>
-                  <a:lnTo>
-                    <a:pt x="4798709" y="3108780"/>
-                  </a:lnTo>
-                  <a:lnTo>
-                    <a:pt x="4727086" y="3095689"/>
-                  </a:lnTo>
-                  <a:lnTo>
-                    <a:pt x="4655464" y="3082142"/>
-                  </a:lnTo>
-                  <a:lnTo>
-                    <a:pt x="4583841" y="3068121"/>
-                  </a:lnTo>
-                  <a:lnTo>
-                    <a:pt x="4512219" y="3053611"/>
-                  </a:lnTo>
-                  <a:lnTo>
-                    <a:pt x="4440596" y="3038595"/>
-                  </a:lnTo>
-                  <a:lnTo>
-                    <a:pt x="4368974" y="3023054"/>
-                  </a:lnTo>
-                  <a:lnTo>
-                    <a:pt x="4297351" y="3006971"/>
-                  </a:lnTo>
-                  <a:lnTo>
-                    <a:pt x="4225729" y="2990326"/>
-                  </a:lnTo>
-                  <a:lnTo>
-                    <a:pt x="4154106" y="2973100"/>
-                  </a:lnTo>
-                  <a:lnTo>
-                    <a:pt x="4082483" y="2955273"/>
-                  </a:lnTo>
-                  <a:lnTo>
-                    <a:pt x="4010861" y="2936823"/>
-                  </a:lnTo>
-                  <a:lnTo>
-                    <a:pt x="3939238" y="2917730"/>
-                  </a:lnTo>
-                  <a:lnTo>
-                    <a:pt x="3867616" y="2897969"/>
-                  </a:lnTo>
-                  <a:lnTo>
-                    <a:pt x="3795993" y="2877519"/>
-                  </a:lnTo>
-                  <a:lnTo>
-                    <a:pt x="3724371" y="2856355"/>
-                  </a:lnTo>
-                  <a:lnTo>
-                    <a:pt x="3652748" y="2834452"/>
-                  </a:lnTo>
-                  <a:lnTo>
-                    <a:pt x="3581126" y="2811785"/>
-                  </a:lnTo>
-                  <a:lnTo>
-                    <a:pt x="3509503" y="2788326"/>
-                  </a:lnTo>
-                  <a:lnTo>
-                    <a:pt x="3437881" y="2764048"/>
-                  </a:lnTo>
-                  <a:lnTo>
-                    <a:pt x="3366258" y="2738923"/>
-                  </a:lnTo>
-                  <a:lnTo>
-                    <a:pt x="3294636" y="2712920"/>
-                  </a:lnTo>
-                  <a:lnTo>
-                    <a:pt x="3223013" y="2686010"/>
-                  </a:lnTo>
-                  <a:lnTo>
-                    <a:pt x="3151391" y="2658160"/>
-                  </a:lnTo>
-                  <a:lnTo>
-                    <a:pt x="3079768" y="2644717"/>
-                  </a:lnTo>
-                  <a:lnTo>
-                    <a:pt x="3008146" y="2633500"/>
-                  </a:lnTo>
-                  <a:lnTo>
-                    <a:pt x="2936523" y="2622133"/>
-                  </a:lnTo>
-                  <a:lnTo>
-                    <a:pt x="2864901" y="2610614"/>
-                  </a:lnTo>
-                  <a:lnTo>
-                    <a:pt x="2793278" y="2598942"/>
-                  </a:lnTo>
-                  <a:lnTo>
-                    <a:pt x="2721655" y="2587113"/>
-                  </a:lnTo>
-                  <a:lnTo>
-                    <a:pt x="2650033" y="2575126"/>
-                  </a:lnTo>
-                  <a:lnTo>
-                    <a:pt x="2578410" y="2562979"/>
-                  </a:lnTo>
-                  <a:lnTo>
-                    <a:pt x="2506788" y="2550669"/>
-                  </a:lnTo>
-                  <a:lnTo>
-                    <a:pt x="2435165" y="2538195"/>
-                  </a:lnTo>
-                  <a:lnTo>
-                    <a:pt x="2363543" y="2525554"/>
-                  </a:lnTo>
-                  <a:lnTo>
-                    <a:pt x="2291920" y="2512744"/>
-                  </a:lnTo>
-                  <a:lnTo>
-                    <a:pt x="2220298" y="2499763"/>
-                  </a:lnTo>
-                  <a:lnTo>
-                    <a:pt x="2148675" y="2486608"/>
-                  </a:lnTo>
-                  <a:lnTo>
-                    <a:pt x="2077053" y="2473278"/>
-                  </a:lnTo>
-                  <a:lnTo>
-                    <a:pt x="2005430" y="2459769"/>
-                  </a:lnTo>
-                  <a:lnTo>
-                    <a:pt x="1933808" y="2446080"/>
-                  </a:lnTo>
-                  <a:lnTo>
-                    <a:pt x="1862185" y="2432207"/>
-                  </a:lnTo>
-                  <a:lnTo>
-                    <a:pt x="1790563" y="2418150"/>
-                  </a:lnTo>
-                  <a:lnTo>
-                    <a:pt x="1718940" y="2403904"/>
-                  </a:lnTo>
-                  <a:lnTo>
-                    <a:pt x="1647318" y="2389468"/>
-                  </a:lnTo>
-                  <a:lnTo>
-                    <a:pt x="1575695" y="2374838"/>
-                  </a:lnTo>
-                  <a:lnTo>
-                    <a:pt x="1504073" y="2360014"/>
-                  </a:lnTo>
-                  <a:lnTo>
-                    <a:pt x="1432450" y="2344991"/>
-                  </a:lnTo>
-                  <a:lnTo>
-                    <a:pt x="1360827" y="2329767"/>
-                  </a:lnTo>
-                  <a:lnTo>
-                    <a:pt x="1289205" y="2314340"/>
-                  </a:lnTo>
-                  <a:lnTo>
-                    <a:pt x="1217582" y="2298706"/>
-                  </a:lnTo>
-                  <a:lnTo>
-                    <a:pt x="1145960" y="2282863"/>
-                  </a:lnTo>
-                  <a:lnTo>
-                    <a:pt x="1074337" y="2266809"/>
-                  </a:lnTo>
-                  <a:lnTo>
-                    <a:pt x="1002715" y="2250540"/>
-                  </a:lnTo>
-                  <a:lnTo>
-                    <a:pt x="931092" y="2234054"/>
-                  </a:lnTo>
-                  <a:lnTo>
-                    <a:pt x="859470" y="2217347"/>
-                  </a:lnTo>
-                  <a:lnTo>
-                    <a:pt x="787847" y="2200416"/>
-                  </a:lnTo>
-                  <a:lnTo>
-                    <a:pt x="716225" y="2183260"/>
-                  </a:lnTo>
-                  <a:lnTo>
-                    <a:pt x="644602" y="2165874"/>
-                  </a:lnTo>
-                  <a:lnTo>
-                    <a:pt x="572980" y="2148256"/>
-                  </a:lnTo>
-                  <a:lnTo>
-                    <a:pt x="501357" y="2130402"/>
-                  </a:lnTo>
-                  <a:lnTo>
-                    <a:pt x="429735" y="2112309"/>
-                  </a:lnTo>
-                  <a:lnTo>
-                    <a:pt x="358112" y="2093975"/>
-                  </a:lnTo>
-                  <a:lnTo>
-                    <a:pt x="286490" y="2075395"/>
-                  </a:lnTo>
-                  <a:lnTo>
-                    <a:pt x="214867" y="2056567"/>
-                  </a:lnTo>
-                  <a:lnTo>
-                    <a:pt x="143245" y="2037487"/>
-                  </a:lnTo>
-                  <a:lnTo>
-                    <a:pt x="71622" y="2018153"/>
-                  </a:lnTo>
-                  <a:lnTo>
-                    <a:pt x="0" y="1998559"/>
+                    <a:pt x="214867" y="73175"/>
+                  </a:lnTo>
+                  <a:lnTo>
+                    <a:pt x="286490" y="189151"/>
+                  </a:lnTo>
+                  <a:lnTo>
+                    <a:pt x="358112" y="301184"/>
+                  </a:lnTo>
+                  <a:lnTo>
+                    <a:pt x="429735" y="409406"/>
+                  </a:lnTo>
+                  <a:lnTo>
+                    <a:pt x="501357" y="513949"/>
+                  </a:lnTo>
+                  <a:lnTo>
+                    <a:pt x="572980" y="614937"/>
+                  </a:lnTo>
+                  <a:lnTo>
+                    <a:pt x="644602" y="712490"/>
+                  </a:lnTo>
+                  <a:lnTo>
+                    <a:pt x="716225" y="806727"/>
+                  </a:lnTo>
+                  <a:lnTo>
+                    <a:pt x="787847" y="897758"/>
+                  </a:lnTo>
+                  <a:lnTo>
+                    <a:pt x="859470" y="985695"/>
+                  </a:lnTo>
+                  <a:lnTo>
+                    <a:pt x="931092" y="1070641"/>
+                  </a:lnTo>
+                  <a:lnTo>
+                    <a:pt x="1002715" y="1152698"/>
+                  </a:lnTo>
+                  <a:lnTo>
+                    <a:pt x="1074337" y="1231965"/>
+                  </a:lnTo>
+                  <a:lnTo>
+                    <a:pt x="1145960" y="1308537"/>
+                  </a:lnTo>
+                  <a:lnTo>
+                    <a:pt x="1217582" y="1382504"/>
+                  </a:lnTo>
+                  <a:lnTo>
+                    <a:pt x="1289205" y="1453957"/>
+                  </a:lnTo>
+                  <a:lnTo>
+                    <a:pt x="1360827" y="1522980"/>
+                  </a:lnTo>
+                  <a:lnTo>
+                    <a:pt x="1432450" y="1589655"/>
+                  </a:lnTo>
+                  <a:lnTo>
+                    <a:pt x="1504073" y="1654064"/>
+                  </a:lnTo>
+                  <a:lnTo>
+                    <a:pt x="1575695" y="1716282"/>
+                  </a:lnTo>
+                  <a:lnTo>
+                    <a:pt x="1647318" y="1776384"/>
+                  </a:lnTo>
+                  <a:lnTo>
+                    <a:pt x="1718940" y="1834443"/>
+                  </a:lnTo>
+                  <a:lnTo>
+                    <a:pt x="1790563" y="1890528"/>
+                  </a:lnTo>
+                  <a:lnTo>
+                    <a:pt x="1862185" y="1944705"/>
+                  </a:lnTo>
+                  <a:lnTo>
+                    <a:pt x="1933808" y="1997040"/>
+                  </a:lnTo>
+                  <a:lnTo>
+                    <a:pt x="2005430" y="2047595"/>
+                  </a:lnTo>
+                  <a:lnTo>
+                    <a:pt x="2077053" y="2096431"/>
+                  </a:lnTo>
+                  <a:lnTo>
+                    <a:pt x="2148675" y="2143607"/>
+                  </a:lnTo>
+                  <a:lnTo>
+                    <a:pt x="2220298" y="2189178"/>
+                  </a:lnTo>
+                  <a:lnTo>
+                    <a:pt x="2291920" y="2233200"/>
+                  </a:lnTo>
+                  <a:lnTo>
+                    <a:pt x="2363543" y="2275724"/>
+                  </a:lnTo>
+                  <a:lnTo>
+                    <a:pt x="2435165" y="2316803"/>
+                  </a:lnTo>
+                  <a:lnTo>
+                    <a:pt x="2506788" y="2356485"/>
+                  </a:lnTo>
+                  <a:lnTo>
+                    <a:pt x="2578410" y="2394817"/>
+                  </a:lnTo>
+                  <a:lnTo>
+                    <a:pt x="2650033" y="2431846"/>
+                  </a:lnTo>
+                  <a:lnTo>
+                    <a:pt x="2721655" y="2467616"/>
+                  </a:lnTo>
+                  <a:lnTo>
+                    <a:pt x="2793278" y="2502169"/>
+                  </a:lnTo>
+                  <a:lnTo>
+                    <a:pt x="2864901" y="2535548"/>
+                  </a:lnTo>
+                  <a:lnTo>
+                    <a:pt x="2936523" y="2567791"/>
+                  </a:lnTo>
+                  <a:lnTo>
+                    <a:pt x="3008146" y="2598938"/>
+                  </a:lnTo>
+                  <a:lnTo>
+                    <a:pt x="3079768" y="2629026"/>
+                  </a:lnTo>
+                  <a:lnTo>
+                    <a:pt x="3151391" y="2655772"/>
+                  </a:lnTo>
+                  <a:lnTo>
+                    <a:pt x="3223013" y="2666886"/>
+                  </a:lnTo>
+                  <a:lnTo>
+                    <a:pt x="3294636" y="2677851"/>
+                  </a:lnTo>
+                  <a:lnTo>
+                    <a:pt x="3366258" y="2688669"/>
+                  </a:lnTo>
+                  <a:lnTo>
+                    <a:pt x="3437881" y="2699341"/>
+                  </a:lnTo>
+                  <a:lnTo>
+                    <a:pt x="3509503" y="2709870"/>
+                  </a:lnTo>
+                  <a:lnTo>
+                    <a:pt x="3581126" y="2720258"/>
+                  </a:lnTo>
+                  <a:lnTo>
+                    <a:pt x="3652748" y="2730506"/>
+                  </a:lnTo>
+                  <a:lnTo>
+                    <a:pt x="3724371" y="2740617"/>
+                  </a:lnTo>
+                  <a:lnTo>
+                    <a:pt x="3795993" y="2750592"/>
+                  </a:lnTo>
+                  <a:lnTo>
+                    <a:pt x="3867616" y="2760433"/>
+                  </a:lnTo>
+                  <a:lnTo>
+                    <a:pt x="3939238" y="2770142"/>
+                  </a:lnTo>
+                  <a:lnTo>
+                    <a:pt x="4010861" y="2779721"/>
+                  </a:lnTo>
+                  <a:lnTo>
+                    <a:pt x="4082483" y="2789171"/>
+                  </a:lnTo>
+                  <a:lnTo>
+                    <a:pt x="4154106" y="2798495"/>
+                  </a:lnTo>
+                  <a:lnTo>
+                    <a:pt x="4225729" y="2807693"/>
+                  </a:lnTo>
+                  <a:lnTo>
+                    <a:pt x="4297351" y="2816768"/>
+                  </a:lnTo>
+                  <a:lnTo>
+                    <a:pt x="4368974" y="2825720"/>
+                  </a:lnTo>
+                  <a:lnTo>
+                    <a:pt x="4440596" y="2834553"/>
+                  </a:lnTo>
+                  <a:lnTo>
+                    <a:pt x="4512219" y="2843267"/>
+                  </a:lnTo>
+                  <a:lnTo>
+                    <a:pt x="4583841" y="2851864"/>
+                  </a:lnTo>
+                  <a:lnTo>
+                    <a:pt x="4655464" y="2860346"/>
+                  </a:lnTo>
+                  <a:lnTo>
+                    <a:pt x="4727086" y="2868714"/>
+                  </a:lnTo>
+                  <a:lnTo>
+                    <a:pt x="4798709" y="2876970"/>
+                  </a:lnTo>
+                  <a:lnTo>
+                    <a:pt x="4870331" y="2885115"/>
+                  </a:lnTo>
+                  <a:lnTo>
+                    <a:pt x="4941954" y="2893150"/>
+                  </a:lnTo>
+                  <a:lnTo>
+                    <a:pt x="5013576" y="2901078"/>
+                  </a:lnTo>
+                  <a:lnTo>
+                    <a:pt x="5085199" y="2908899"/>
+                  </a:lnTo>
+                  <a:lnTo>
+                    <a:pt x="5156821" y="2916615"/>
+                  </a:lnTo>
+                  <a:lnTo>
+                    <a:pt x="5228444" y="2924228"/>
+                  </a:lnTo>
+                  <a:lnTo>
+                    <a:pt x="5300066" y="2931738"/>
+                  </a:lnTo>
+                  <a:lnTo>
+                    <a:pt x="5371689" y="2939148"/>
+                  </a:lnTo>
+                  <a:lnTo>
+                    <a:pt x="5443311" y="2946458"/>
+                  </a:lnTo>
+                  <a:lnTo>
+                    <a:pt x="5514934" y="2953670"/>
+                  </a:lnTo>
+                  <a:lnTo>
+                    <a:pt x="5586557" y="2960785"/>
+                  </a:lnTo>
+                  <a:lnTo>
+                    <a:pt x="5658179" y="2967805"/>
+                  </a:lnTo>
+                  <a:lnTo>
+                    <a:pt x="5729802" y="2974731"/>
+                  </a:lnTo>
+                  <a:lnTo>
+                    <a:pt x="5801424" y="2981563"/>
+                  </a:lnTo>
+                  <a:lnTo>
+                    <a:pt x="5873047" y="2988304"/>
+                  </a:lnTo>
+                  <a:lnTo>
+                    <a:pt x="5944669" y="2994954"/>
+                  </a:lnTo>
+                  <a:lnTo>
+                    <a:pt x="6016292" y="3001515"/>
+                  </a:lnTo>
+                  <a:lnTo>
+                    <a:pt x="6087914" y="3007988"/>
+                  </a:lnTo>
+                  <a:lnTo>
+                    <a:pt x="6159537" y="3014375"/>
+                  </a:lnTo>
+                  <a:lnTo>
+                    <a:pt x="6231159" y="3020675"/>
+                  </a:lnTo>
+                  <a:lnTo>
+                    <a:pt x="6302782" y="3026891"/>
+                  </a:lnTo>
+                  <a:lnTo>
+                    <a:pt x="6374404" y="3033023"/>
+                  </a:lnTo>
+                  <a:lnTo>
+                    <a:pt x="6446027" y="3039073"/>
+                  </a:lnTo>
+                  <a:lnTo>
+                    <a:pt x="6517649" y="3045042"/>
+                  </a:lnTo>
+                  <a:lnTo>
+                    <a:pt x="6589272" y="3050931"/>
+                  </a:lnTo>
+                  <a:lnTo>
+                    <a:pt x="6660894" y="3056741"/>
+                  </a:lnTo>
+                  <a:lnTo>
+                    <a:pt x="6732517" y="3062472"/>
+                  </a:lnTo>
+                  <a:lnTo>
+                    <a:pt x="6804139" y="3068127"/>
+                  </a:lnTo>
+                  <a:lnTo>
+                    <a:pt x="6875762" y="3073706"/>
+                  </a:lnTo>
+                  <a:lnTo>
+                    <a:pt x="6947385" y="3079210"/>
+                  </a:lnTo>
+                  <a:lnTo>
+                    <a:pt x="7019007" y="3084640"/>
+                  </a:lnTo>
+                  <a:lnTo>
+                    <a:pt x="7090630" y="3089997"/>
+                  </a:lnTo>
+                  <a:lnTo>
+                    <a:pt x="7090630" y="3360601"/>
+                  </a:lnTo>
+                  <a:lnTo>
+                    <a:pt x="7019007" y="3356266"/>
+                  </a:lnTo>
+                  <a:lnTo>
+                    <a:pt x="6947385" y="3351778"/>
+                  </a:lnTo>
+                  <a:lnTo>
+                    <a:pt x="6875762" y="3347132"/>
+                  </a:lnTo>
+                  <a:lnTo>
+                    <a:pt x="6804139" y="3342323"/>
+                  </a:lnTo>
+                  <a:lnTo>
+                    <a:pt x="6732517" y="3337345"/>
+                  </a:lnTo>
+                  <a:lnTo>
+                    <a:pt x="6660894" y="3332191"/>
+                  </a:lnTo>
+                  <a:lnTo>
+                    <a:pt x="6589272" y="3326856"/>
+                  </a:lnTo>
+                  <a:lnTo>
+                    <a:pt x="6517649" y="3321334"/>
+                  </a:lnTo>
+                  <a:lnTo>
+                    <a:pt x="6446027" y="3315616"/>
+                  </a:lnTo>
+                  <a:lnTo>
+                    <a:pt x="6374404" y="3309698"/>
+                  </a:lnTo>
+                  <a:lnTo>
+                    <a:pt x="6302782" y="3303571"/>
+                  </a:lnTo>
+                  <a:lnTo>
+                    <a:pt x="6231159" y="3297228"/>
+                  </a:lnTo>
+                  <a:lnTo>
+                    <a:pt x="6159537" y="3290663"/>
+                  </a:lnTo>
+                  <a:lnTo>
+                    <a:pt x="6087914" y="3283866"/>
+                  </a:lnTo>
+                  <a:lnTo>
+                    <a:pt x="6016292" y="3276830"/>
+                  </a:lnTo>
+                  <a:lnTo>
+                    <a:pt x="5944669" y="3269546"/>
+                  </a:lnTo>
+                  <a:lnTo>
+                    <a:pt x="5873047" y="3262005"/>
+                  </a:lnTo>
+                  <a:lnTo>
+                    <a:pt x="5801424" y="3254200"/>
+                  </a:lnTo>
+                  <a:lnTo>
+                    <a:pt x="5729802" y="3246119"/>
+                  </a:lnTo>
+                  <a:lnTo>
+                    <a:pt x="5658179" y="3237754"/>
+                  </a:lnTo>
+                  <a:lnTo>
+                    <a:pt x="5586557" y="3229095"/>
+                  </a:lnTo>
+                  <a:lnTo>
+                    <a:pt x="5514934" y="3220131"/>
+                  </a:lnTo>
+                  <a:lnTo>
+                    <a:pt x="5443311" y="3210851"/>
+                  </a:lnTo>
+                  <a:lnTo>
+                    <a:pt x="5371689" y="3201244"/>
+                  </a:lnTo>
+                  <a:lnTo>
+                    <a:pt x="5300066" y="3191300"/>
+                  </a:lnTo>
+                  <a:lnTo>
+                    <a:pt x="5228444" y="3181005"/>
+                  </a:lnTo>
+                  <a:lnTo>
+                    <a:pt x="5156821" y="3170348"/>
+                  </a:lnTo>
+                  <a:lnTo>
+                    <a:pt x="5085199" y="3159316"/>
+                  </a:lnTo>
+                  <a:lnTo>
+                    <a:pt x="5013576" y="3147895"/>
+                  </a:lnTo>
+                  <a:lnTo>
+                    <a:pt x="4941954" y="3136073"/>
+                  </a:lnTo>
+                  <a:lnTo>
+                    <a:pt x="4870331" y="3123834"/>
+                  </a:lnTo>
+                  <a:lnTo>
+                    <a:pt x="4798709" y="3111164"/>
+                  </a:lnTo>
+                  <a:lnTo>
+                    <a:pt x="4727086" y="3098048"/>
+                  </a:lnTo>
+                  <a:lnTo>
+                    <a:pt x="4655464" y="3084471"/>
+                  </a:lnTo>
+                  <a:lnTo>
+                    <a:pt x="4583841" y="3070416"/>
+                  </a:lnTo>
+                  <a:lnTo>
+                    <a:pt x="4512219" y="3055866"/>
+                  </a:lnTo>
+                  <a:lnTo>
+                    <a:pt x="4440596" y="3040804"/>
+                  </a:lnTo>
+                  <a:lnTo>
+                    <a:pt x="4368974" y="3025211"/>
+                  </a:lnTo>
+                  <a:lnTo>
+                    <a:pt x="4297351" y="3009070"/>
+                  </a:lnTo>
+                  <a:lnTo>
+                    <a:pt x="4225729" y="2992360"/>
+                  </a:lnTo>
+                  <a:lnTo>
+                    <a:pt x="4154106" y="2975063"/>
+                  </a:lnTo>
+                  <a:lnTo>
+                    <a:pt x="4082483" y="2957156"/>
+                  </a:lnTo>
+                  <a:lnTo>
+                    <a:pt x="4010861" y="2938619"/>
+                  </a:lnTo>
+                  <a:lnTo>
+                    <a:pt x="3939238" y="2919429"/>
+                  </a:lnTo>
+                  <a:lnTo>
+                    <a:pt x="3867616" y="2899564"/>
+                  </a:lnTo>
+                  <a:lnTo>
+                    <a:pt x="3795993" y="2879000"/>
+                  </a:lnTo>
+                  <a:lnTo>
+                    <a:pt x="3724371" y="2857712"/>
+                  </a:lnTo>
+                  <a:lnTo>
+                    <a:pt x="3652748" y="2835674"/>
+                  </a:lnTo>
+                  <a:lnTo>
+                    <a:pt x="3581126" y="2812861"/>
+                  </a:lnTo>
+                  <a:lnTo>
+                    <a:pt x="3509503" y="2789244"/>
+                  </a:lnTo>
+                  <a:lnTo>
+                    <a:pt x="3437881" y="2764796"/>
+                  </a:lnTo>
+                  <a:lnTo>
+                    <a:pt x="3366258" y="2739488"/>
+                  </a:lnTo>
+                  <a:lnTo>
+                    <a:pt x="3294636" y="2713289"/>
+                  </a:lnTo>
+                  <a:lnTo>
+                    <a:pt x="3223013" y="2686167"/>
+                  </a:lnTo>
+                  <a:lnTo>
+                    <a:pt x="3151391" y="2658091"/>
+                  </a:lnTo>
+                  <a:lnTo>
+                    <a:pt x="3079768" y="2644507"/>
+                  </a:lnTo>
+                  <a:lnTo>
+                    <a:pt x="3008146" y="2633089"/>
+                  </a:lnTo>
+                  <a:lnTo>
+                    <a:pt x="2936523" y="2621515"/>
+                  </a:lnTo>
+                  <a:lnTo>
+                    <a:pt x="2864901" y="2609784"/>
+                  </a:lnTo>
+                  <a:lnTo>
+                    <a:pt x="2793278" y="2597893"/>
+                  </a:lnTo>
+                  <a:lnTo>
+                    <a:pt x="2721655" y="2585840"/>
+                  </a:lnTo>
+                  <a:lnTo>
+                    <a:pt x="2650033" y="2573624"/>
+                  </a:lnTo>
+                  <a:lnTo>
+                    <a:pt x="2578410" y="2561241"/>
+                  </a:lnTo>
+                  <a:lnTo>
+                    <a:pt x="2506788" y="2548689"/>
+                  </a:lnTo>
+                  <a:lnTo>
+                    <a:pt x="2435165" y="2535967"/>
+                  </a:lnTo>
+                  <a:lnTo>
+                    <a:pt x="2363543" y="2523072"/>
+                  </a:lnTo>
+                  <a:lnTo>
+                    <a:pt x="2291920" y="2510001"/>
+                  </a:lnTo>
+                  <a:lnTo>
+                    <a:pt x="2220298" y="2496753"/>
+                  </a:lnTo>
+                  <a:lnTo>
+                    <a:pt x="2148675" y="2483324"/>
+                  </a:lnTo>
+                  <a:lnTo>
+                    <a:pt x="2077053" y="2469713"/>
+                  </a:lnTo>
+                  <a:lnTo>
+                    <a:pt x="2005430" y="2455916"/>
+                  </a:lnTo>
+                  <a:lnTo>
+                    <a:pt x="1933808" y="2441932"/>
+                  </a:lnTo>
+                  <a:lnTo>
+                    <a:pt x="1862185" y="2427757"/>
+                  </a:lnTo>
+                  <a:lnTo>
+                    <a:pt x="1790563" y="2413390"/>
+                  </a:lnTo>
+                  <a:lnTo>
+                    <a:pt x="1718940" y="2398827"/>
+                  </a:lnTo>
+                  <a:lnTo>
+                    <a:pt x="1647318" y="2384066"/>
+                  </a:lnTo>
+                  <a:lnTo>
+                    <a:pt x="1575695" y="2369104"/>
+                  </a:lnTo>
+                  <a:lnTo>
+                    <a:pt x="1504073" y="2353938"/>
+                  </a:lnTo>
+                  <a:lnTo>
+                    <a:pt x="1432450" y="2338567"/>
+                  </a:lnTo>
+                  <a:lnTo>
+                    <a:pt x="1360827" y="2322986"/>
+                  </a:lnTo>
+                  <a:lnTo>
+                    <a:pt x="1289205" y="2307193"/>
+                  </a:lnTo>
+                  <a:lnTo>
+                    <a:pt x="1217582" y="2291185"/>
+                  </a:lnTo>
+                  <a:lnTo>
+                    <a:pt x="1145960" y="2274959"/>
+                  </a:lnTo>
+                  <a:lnTo>
+                    <a:pt x="1074337" y="2258513"/>
+                  </a:lnTo>
+                  <a:lnTo>
+                    <a:pt x="1002715" y="2241843"/>
+                  </a:lnTo>
+                  <a:lnTo>
+                    <a:pt x="931092" y="2224946"/>
+                  </a:lnTo>
+                  <a:lnTo>
+                    <a:pt x="859470" y="2207819"/>
+                  </a:lnTo>
+                  <a:lnTo>
+                    <a:pt x="787847" y="2190459"/>
+                  </a:lnTo>
+                  <a:lnTo>
+                    <a:pt x="716225" y="2172863"/>
+                  </a:lnTo>
+                  <a:lnTo>
+                    <a:pt x="644602" y="2155028"/>
+                  </a:lnTo>
+                  <a:lnTo>
+                    <a:pt x="572980" y="2136949"/>
+                  </a:lnTo>
+                  <a:lnTo>
+                    <a:pt x="501357" y="2118625"/>
+                  </a:lnTo>
+                  <a:lnTo>
+                    <a:pt x="429735" y="2100052"/>
+                  </a:lnTo>
+                  <a:lnTo>
+                    <a:pt x="358112" y="2081226"/>
+                  </a:lnTo>
+                  <a:lnTo>
+                    <a:pt x="286490" y="2062143"/>
+                  </a:lnTo>
+                  <a:lnTo>
+                    <a:pt x="214867" y="2042802"/>
+                  </a:lnTo>
+                  <a:lnTo>
+                    <a:pt x="143245" y="2023197"/>
+                  </a:lnTo>
+                  <a:lnTo>
+                    <a:pt x="71622" y="2003325"/>
+                  </a:lnTo>
+                  <a:lnTo>
+                    <a:pt x="0" y="1983183"/>
                   </a:lnTo>
                   <a:close/>
                 </a:path>
@@ -3627,306 +3627,306 @@
           </p:nvSpPr>
           <p:spPr>
             <a:xfrm>
-              <a:off x="1318437" y="2073503"/>
-              <a:ext cx="6944242" cy="3084909"/>
+              <a:off x="1343263" y="2073503"/>
+              <a:ext cx="6919416" cy="3089997"/>
             </a:xfrm>
             <a:custGeom>
               <a:avLst/>
               <a:pathLst>
-                <a:path w="6944242" h="3084909">
+                <a:path w="6919416" h="3089997">
                   <a:moveTo>
                     <a:pt x="0" y="0"/>
                   </a:moveTo>
                   <a:lnTo>
-                    <a:pt x="68479" y="112528"/>
-                  </a:lnTo>
-                  <a:lnTo>
-                    <a:pt x="140102" y="226251"/>
-                  </a:lnTo>
-                  <a:lnTo>
-                    <a:pt x="211724" y="336137"/>
-                  </a:lnTo>
-                  <a:lnTo>
-                    <a:pt x="283347" y="442317"/>
-                  </a:lnTo>
-                  <a:lnTo>
-                    <a:pt x="354969" y="544914"/>
-                  </a:lnTo>
-                  <a:lnTo>
-                    <a:pt x="426592" y="644051"/>
-                  </a:lnTo>
-                  <a:lnTo>
-                    <a:pt x="498214" y="739844"/>
-                  </a:lnTo>
-                  <a:lnTo>
-                    <a:pt x="569837" y="832405"/>
-                  </a:lnTo>
-                  <a:lnTo>
-                    <a:pt x="641460" y="921844"/>
-                  </a:lnTo>
-                  <a:lnTo>
-                    <a:pt x="713082" y="1008265"/>
-                  </a:lnTo>
-                  <a:lnTo>
-                    <a:pt x="784705" y="1091772"/>
-                  </a:lnTo>
-                  <a:lnTo>
-                    <a:pt x="856327" y="1172461"/>
-                  </a:lnTo>
-                  <a:lnTo>
-                    <a:pt x="927950" y="1250429"/>
-                  </a:lnTo>
-                  <a:lnTo>
-                    <a:pt x="999572" y="1325766"/>
-                  </a:lnTo>
-                  <a:lnTo>
-                    <a:pt x="1071195" y="1398562"/>
-                  </a:lnTo>
-                  <a:lnTo>
-                    <a:pt x="1142817" y="1468903"/>
-                  </a:lnTo>
-                  <a:lnTo>
-                    <a:pt x="1214440" y="1536870"/>
-                  </a:lnTo>
-                  <a:lnTo>
-                    <a:pt x="1286062" y="1602545"/>
-                  </a:lnTo>
-                  <a:lnTo>
-                    <a:pt x="1357685" y="1666004"/>
-                  </a:lnTo>
-                  <a:lnTo>
-                    <a:pt x="1429307" y="1727323"/>
-                  </a:lnTo>
-                  <a:lnTo>
-                    <a:pt x="1500930" y="1786573"/>
-                  </a:lnTo>
-                  <a:lnTo>
-                    <a:pt x="1572552" y="1843824"/>
-                  </a:lnTo>
-                  <a:lnTo>
-                    <a:pt x="1644175" y="1899144"/>
-                  </a:lnTo>
-                  <a:lnTo>
-                    <a:pt x="1715797" y="1952598"/>
-                  </a:lnTo>
-                  <a:lnTo>
-                    <a:pt x="1787420" y="2004249"/>
-                  </a:lnTo>
-                  <a:lnTo>
-                    <a:pt x="1859042" y="2054158"/>
-                  </a:lnTo>
-                  <a:lnTo>
-                    <a:pt x="1930665" y="2102383"/>
-                  </a:lnTo>
-                  <a:lnTo>
-                    <a:pt x="2002288" y="2148981"/>
-                  </a:lnTo>
-                  <a:lnTo>
-                    <a:pt x="2073910" y="2194007"/>
-                  </a:lnTo>
-                  <a:lnTo>
-                    <a:pt x="2145533" y="2237514"/>
-                  </a:lnTo>
-                  <a:lnTo>
-                    <a:pt x="2217155" y="2279554"/>
-                  </a:lnTo>
-                  <a:lnTo>
-                    <a:pt x="2288778" y="2320175"/>
-                  </a:lnTo>
-                  <a:lnTo>
-                    <a:pt x="2360400" y="2359427"/>
-                  </a:lnTo>
-                  <a:lnTo>
-                    <a:pt x="2432023" y="2397354"/>
-                  </a:lnTo>
-                  <a:lnTo>
-                    <a:pt x="2503645" y="2434001"/>
-                  </a:lnTo>
-                  <a:lnTo>
-                    <a:pt x="2575268" y="2469413"/>
-                  </a:lnTo>
-                  <a:lnTo>
-                    <a:pt x="2646890" y="2503630"/>
-                  </a:lnTo>
-                  <a:lnTo>
-                    <a:pt x="2718513" y="2536692"/>
-                  </a:lnTo>
-                  <a:lnTo>
-                    <a:pt x="2790135" y="2568640"/>
-                  </a:lnTo>
-                  <a:lnTo>
-                    <a:pt x="2861758" y="2599509"/>
-                  </a:lnTo>
-                  <a:lnTo>
-                    <a:pt x="2933380" y="2629338"/>
-                  </a:lnTo>
-                  <a:lnTo>
-                    <a:pt x="3005003" y="2655785"/>
-                  </a:lnTo>
-                  <a:lnTo>
-                    <a:pt x="3076625" y="2666708"/>
-                  </a:lnTo>
-                  <a:lnTo>
-                    <a:pt x="3148248" y="2677487"/>
-                  </a:lnTo>
-                  <a:lnTo>
-                    <a:pt x="3219870" y="2688124"/>
-                  </a:lnTo>
-                  <a:lnTo>
-                    <a:pt x="3291493" y="2698620"/>
-                  </a:lnTo>
-                  <a:lnTo>
-                    <a:pt x="3363116" y="2708977"/>
-                  </a:lnTo>
-                  <a:lnTo>
-                    <a:pt x="3434738" y="2719199"/>
-                  </a:lnTo>
-                  <a:lnTo>
-                    <a:pt x="3506361" y="2729285"/>
-                  </a:lnTo>
-                  <a:lnTo>
-                    <a:pt x="3577983" y="2739238"/>
-                  </a:lnTo>
-                  <a:lnTo>
-                    <a:pt x="3649606" y="2749060"/>
-                  </a:lnTo>
-                  <a:lnTo>
-                    <a:pt x="3721228" y="2758752"/>
-                  </a:lnTo>
-                  <a:lnTo>
-                    <a:pt x="3792851" y="2768317"/>
-                  </a:lnTo>
-                  <a:lnTo>
-                    <a:pt x="3864473" y="2777755"/>
-                  </a:lnTo>
-                  <a:lnTo>
-                    <a:pt x="3936096" y="2787069"/>
-                  </a:lnTo>
-                  <a:lnTo>
-                    <a:pt x="4007718" y="2796259"/>
-                  </a:lnTo>
-                  <a:lnTo>
-                    <a:pt x="4079341" y="2805329"/>
-                  </a:lnTo>
-                  <a:lnTo>
-                    <a:pt x="4150963" y="2814279"/>
-                  </a:lnTo>
-                  <a:lnTo>
-                    <a:pt x="4222586" y="2823111"/>
-                  </a:lnTo>
-                  <a:lnTo>
-                    <a:pt x="4294208" y="2831826"/>
-                  </a:lnTo>
-                  <a:lnTo>
-                    <a:pt x="4365831" y="2840427"/>
-                  </a:lnTo>
-                  <a:lnTo>
-                    <a:pt x="4437453" y="2848914"/>
-                  </a:lnTo>
-                  <a:lnTo>
-                    <a:pt x="4509076" y="2857289"/>
-                  </a:lnTo>
-                  <a:lnTo>
-                    <a:pt x="4580698" y="2865553"/>
-                  </a:lnTo>
-                  <a:lnTo>
-                    <a:pt x="4652321" y="2873709"/>
-                  </a:lnTo>
-                  <a:lnTo>
-                    <a:pt x="4723944" y="2881757"/>
-                  </a:lnTo>
-                  <a:lnTo>
-                    <a:pt x="4795566" y="2889698"/>
-                  </a:lnTo>
-                  <a:lnTo>
-                    <a:pt x="4867189" y="2897535"/>
-                  </a:lnTo>
-                  <a:lnTo>
-                    <a:pt x="4938811" y="2905269"/>
-                  </a:lnTo>
-                  <a:lnTo>
-                    <a:pt x="5010434" y="2912900"/>
-                  </a:lnTo>
-                  <a:lnTo>
-                    <a:pt x="5082056" y="2920431"/>
-                  </a:lnTo>
-                  <a:lnTo>
-                    <a:pt x="5153679" y="2927863"/>
-                  </a:lnTo>
-                  <a:lnTo>
-                    <a:pt x="5225301" y="2935196"/>
-                  </a:lnTo>
-                  <a:lnTo>
-                    <a:pt x="5296924" y="2942433"/>
-                  </a:lnTo>
-                  <a:lnTo>
-                    <a:pt x="5368546" y="2949574"/>
-                  </a:lnTo>
-                  <a:lnTo>
-                    <a:pt x="5440169" y="2956621"/>
-                  </a:lnTo>
-                  <a:lnTo>
-                    <a:pt x="5511791" y="2963575"/>
-                  </a:lnTo>
-                  <a:lnTo>
-                    <a:pt x="5583414" y="2970438"/>
-                  </a:lnTo>
-                  <a:lnTo>
-                    <a:pt x="5655036" y="2977209"/>
-                  </a:lnTo>
-                  <a:lnTo>
-                    <a:pt x="5726659" y="2983892"/>
-                  </a:lnTo>
-                  <a:lnTo>
-                    <a:pt x="5798281" y="2990486"/>
-                  </a:lnTo>
-                  <a:lnTo>
-                    <a:pt x="5869904" y="2996993"/>
-                  </a:lnTo>
-                  <a:lnTo>
-                    <a:pt x="5941526" y="3003415"/>
-                  </a:lnTo>
-                  <a:lnTo>
-                    <a:pt x="6013149" y="3009752"/>
-                  </a:lnTo>
-                  <a:lnTo>
-                    <a:pt x="6084772" y="3016005"/>
-                  </a:lnTo>
-                  <a:lnTo>
-                    <a:pt x="6156394" y="3022175"/>
-                  </a:lnTo>
-                  <a:lnTo>
-                    <a:pt x="6228017" y="3028265"/>
-                  </a:lnTo>
-                  <a:lnTo>
-                    <a:pt x="6299639" y="3034274"/>
-                  </a:lnTo>
-                  <a:lnTo>
-                    <a:pt x="6371262" y="3040203"/>
-                  </a:lnTo>
-                  <a:lnTo>
-                    <a:pt x="6442884" y="3046055"/>
-                  </a:lnTo>
-                  <a:lnTo>
-                    <a:pt x="6514507" y="3051829"/>
-                  </a:lnTo>
-                  <a:lnTo>
-                    <a:pt x="6586129" y="3057527"/>
-                  </a:lnTo>
-                  <a:lnTo>
-                    <a:pt x="6657752" y="3063150"/>
-                  </a:lnTo>
-                  <a:lnTo>
-                    <a:pt x="6729374" y="3068698"/>
-                  </a:lnTo>
-                  <a:lnTo>
-                    <a:pt x="6800997" y="3074174"/>
-                  </a:lnTo>
-                  <a:lnTo>
-                    <a:pt x="6872619" y="3079577"/>
-                  </a:lnTo>
-                  <a:lnTo>
-                    <a:pt x="6944242" y="3084909"/>
+                    <a:pt x="43653" y="73175"/>
+                  </a:lnTo>
+                  <a:lnTo>
+                    <a:pt x="115276" y="189151"/>
+                  </a:lnTo>
+                  <a:lnTo>
+                    <a:pt x="186898" y="301184"/>
+                  </a:lnTo>
+                  <a:lnTo>
+                    <a:pt x="258521" y="409406"/>
+                  </a:lnTo>
+                  <a:lnTo>
+                    <a:pt x="330143" y="513949"/>
+                  </a:lnTo>
+                  <a:lnTo>
+                    <a:pt x="401766" y="614937"/>
+                  </a:lnTo>
+                  <a:lnTo>
+                    <a:pt x="473388" y="712490"/>
+                  </a:lnTo>
+                  <a:lnTo>
+                    <a:pt x="545011" y="806727"/>
+                  </a:lnTo>
+                  <a:lnTo>
+                    <a:pt x="616634" y="897758"/>
+                  </a:lnTo>
+                  <a:lnTo>
+                    <a:pt x="688256" y="985695"/>
+                  </a:lnTo>
+                  <a:lnTo>
+                    <a:pt x="759879" y="1070641"/>
+                  </a:lnTo>
+                  <a:lnTo>
+                    <a:pt x="831501" y="1152698"/>
+                  </a:lnTo>
+                  <a:lnTo>
+                    <a:pt x="903124" y="1231965"/>
+                  </a:lnTo>
+                  <a:lnTo>
+                    <a:pt x="974746" y="1308537"/>
+                  </a:lnTo>
+                  <a:lnTo>
+                    <a:pt x="1046369" y="1382504"/>
+                  </a:lnTo>
+                  <a:lnTo>
+                    <a:pt x="1117991" y="1453957"/>
+                  </a:lnTo>
+                  <a:lnTo>
+                    <a:pt x="1189614" y="1522980"/>
+                  </a:lnTo>
+                  <a:lnTo>
+                    <a:pt x="1261236" y="1589655"/>
+                  </a:lnTo>
+                  <a:lnTo>
+                    <a:pt x="1332859" y="1654064"/>
+                  </a:lnTo>
+                  <a:lnTo>
+                    <a:pt x="1404481" y="1716282"/>
+                  </a:lnTo>
+                  <a:lnTo>
+                    <a:pt x="1476104" y="1776384"/>
+                  </a:lnTo>
+                  <a:lnTo>
+                    <a:pt x="1547726" y="1834443"/>
+                  </a:lnTo>
+                  <a:lnTo>
+                    <a:pt x="1619349" y="1890528"/>
+                  </a:lnTo>
+                  <a:lnTo>
+                    <a:pt x="1690971" y="1944705"/>
+                  </a:lnTo>
+                  <a:lnTo>
+                    <a:pt x="1762594" y="1997040"/>
+                  </a:lnTo>
+                  <a:lnTo>
+                    <a:pt x="1834216" y="2047595"/>
+                  </a:lnTo>
+                  <a:lnTo>
+                    <a:pt x="1905839" y="2096431"/>
+                  </a:lnTo>
+                  <a:lnTo>
+                    <a:pt x="1977462" y="2143607"/>
+                  </a:lnTo>
+                  <a:lnTo>
+                    <a:pt x="2049084" y="2189178"/>
+                  </a:lnTo>
+                  <a:lnTo>
+                    <a:pt x="2120707" y="2233200"/>
+                  </a:lnTo>
+                  <a:lnTo>
+                    <a:pt x="2192329" y="2275724"/>
+                  </a:lnTo>
+                  <a:lnTo>
+                    <a:pt x="2263952" y="2316803"/>
+                  </a:lnTo>
+                  <a:lnTo>
+                    <a:pt x="2335574" y="2356485"/>
+                  </a:lnTo>
+                  <a:lnTo>
+                    <a:pt x="2407197" y="2394817"/>
+                  </a:lnTo>
+                  <a:lnTo>
+                    <a:pt x="2478819" y="2431846"/>
+                  </a:lnTo>
+                  <a:lnTo>
+                    <a:pt x="2550442" y="2467616"/>
+                  </a:lnTo>
+                  <a:lnTo>
+                    <a:pt x="2622064" y="2502169"/>
+                  </a:lnTo>
+                  <a:lnTo>
+                    <a:pt x="2693687" y="2535548"/>
+                  </a:lnTo>
+                  <a:lnTo>
+                    <a:pt x="2765309" y="2567791"/>
+                  </a:lnTo>
+                  <a:lnTo>
+                    <a:pt x="2836932" y="2598938"/>
+                  </a:lnTo>
+                  <a:lnTo>
+                    <a:pt x="2908554" y="2629026"/>
+                  </a:lnTo>
+                  <a:lnTo>
+                    <a:pt x="2980177" y="2655772"/>
+                  </a:lnTo>
+                  <a:lnTo>
+                    <a:pt x="3051799" y="2666886"/>
+                  </a:lnTo>
+                  <a:lnTo>
+                    <a:pt x="3123422" y="2677851"/>
+                  </a:lnTo>
+                  <a:lnTo>
+                    <a:pt x="3195044" y="2688669"/>
+                  </a:lnTo>
+                  <a:lnTo>
+                    <a:pt x="3266667" y="2699341"/>
+                  </a:lnTo>
+                  <a:lnTo>
+                    <a:pt x="3338290" y="2709870"/>
+                  </a:lnTo>
+                  <a:lnTo>
+                    <a:pt x="3409912" y="2720258"/>
+                  </a:lnTo>
+                  <a:lnTo>
+                    <a:pt x="3481535" y="2730506"/>
+                  </a:lnTo>
+                  <a:lnTo>
+                    <a:pt x="3553157" y="2740617"/>
+                  </a:lnTo>
+                  <a:lnTo>
+                    <a:pt x="3624780" y="2750592"/>
+                  </a:lnTo>
+                  <a:lnTo>
+                    <a:pt x="3696402" y="2760433"/>
+                  </a:lnTo>
+                  <a:lnTo>
+                    <a:pt x="3768025" y="2770142"/>
+                  </a:lnTo>
+                  <a:lnTo>
+                    <a:pt x="3839647" y="2779721"/>
+                  </a:lnTo>
+                  <a:lnTo>
+                    <a:pt x="3911270" y="2789171"/>
+                  </a:lnTo>
+                  <a:lnTo>
+                    <a:pt x="3982892" y="2798495"/>
+                  </a:lnTo>
+                  <a:lnTo>
+                    <a:pt x="4054515" y="2807693"/>
+                  </a:lnTo>
+                  <a:lnTo>
+                    <a:pt x="4126137" y="2816768"/>
+                  </a:lnTo>
+                  <a:lnTo>
+                    <a:pt x="4197760" y="2825720"/>
+                  </a:lnTo>
+                  <a:lnTo>
+                    <a:pt x="4269382" y="2834553"/>
+                  </a:lnTo>
+                  <a:lnTo>
+                    <a:pt x="4341005" y="2843267"/>
+                  </a:lnTo>
+                  <a:lnTo>
+                    <a:pt x="4412627" y="2851864"/>
+                  </a:lnTo>
+                  <a:lnTo>
+                    <a:pt x="4484250" y="2860346"/>
+                  </a:lnTo>
+                  <a:lnTo>
+                    <a:pt x="4555872" y="2868714"/>
+                  </a:lnTo>
+                  <a:lnTo>
+                    <a:pt x="4627495" y="2876970"/>
+                  </a:lnTo>
+                  <a:lnTo>
+                    <a:pt x="4699118" y="2885115"/>
+                  </a:lnTo>
+                  <a:lnTo>
+                    <a:pt x="4770740" y="2893150"/>
+                  </a:lnTo>
+                  <a:lnTo>
+                    <a:pt x="4842363" y="2901078"/>
+                  </a:lnTo>
+                  <a:lnTo>
+                    <a:pt x="4913985" y="2908899"/>
+                  </a:lnTo>
+                  <a:lnTo>
+                    <a:pt x="4985608" y="2916615"/>
+                  </a:lnTo>
+                  <a:lnTo>
+                    <a:pt x="5057230" y="2924228"/>
+                  </a:lnTo>
+                  <a:lnTo>
+                    <a:pt x="5128853" y="2931738"/>
+                  </a:lnTo>
+                  <a:lnTo>
+                    <a:pt x="5200475" y="2939148"/>
+                  </a:lnTo>
+                  <a:lnTo>
+                    <a:pt x="5272098" y="2946458"/>
+                  </a:lnTo>
+                  <a:lnTo>
+                    <a:pt x="5343720" y="2953670"/>
+                  </a:lnTo>
+                  <a:lnTo>
+                    <a:pt x="5415343" y="2960785"/>
+                  </a:lnTo>
+                  <a:lnTo>
+                    <a:pt x="5486965" y="2967805"/>
+                  </a:lnTo>
+                  <a:lnTo>
+                    <a:pt x="5558588" y="2974731"/>
+                  </a:lnTo>
+                  <a:lnTo>
+                    <a:pt x="5630210" y="2981563"/>
+                  </a:lnTo>
+                  <a:lnTo>
+                    <a:pt x="5701833" y="2988304"/>
+                  </a:lnTo>
+                  <a:lnTo>
+                    <a:pt x="5773455" y="2994954"/>
+                  </a:lnTo>
+                  <a:lnTo>
+                    <a:pt x="5845078" y="3001515"/>
+                  </a:lnTo>
+                  <a:lnTo>
+                    <a:pt x="5916700" y="3007988"/>
+                  </a:lnTo>
+                  <a:lnTo>
+                    <a:pt x="5988323" y="3014375"/>
+                  </a:lnTo>
+                  <a:lnTo>
+                    <a:pt x="6059946" y="3020675"/>
+                  </a:lnTo>
+                  <a:lnTo>
+                    <a:pt x="6131568" y="3026891"/>
+                  </a:lnTo>
+                  <a:lnTo>
+                    <a:pt x="6203191" y="3033023"/>
+                  </a:lnTo>
+                  <a:lnTo>
+                    <a:pt x="6274813" y="3039073"/>
+                  </a:lnTo>
+                  <a:lnTo>
+                    <a:pt x="6346436" y="3045042"/>
+                  </a:lnTo>
+                  <a:lnTo>
+                    <a:pt x="6418058" y="3050931"/>
+                  </a:lnTo>
+                  <a:lnTo>
+                    <a:pt x="6489681" y="3056741"/>
+                  </a:lnTo>
+                  <a:lnTo>
+                    <a:pt x="6561303" y="3062472"/>
+                  </a:lnTo>
+                  <a:lnTo>
+                    <a:pt x="6632926" y="3068127"/>
+                  </a:lnTo>
+                  <a:lnTo>
+                    <a:pt x="6704548" y="3073706"/>
+                  </a:lnTo>
+                  <a:lnTo>
+                    <a:pt x="6776171" y="3079210"/>
+                  </a:lnTo>
+                  <a:lnTo>
+                    <a:pt x="6847793" y="3084640"/>
+                  </a:lnTo>
+                  <a:lnTo>
+                    <a:pt x="6919416" y="3089997"/>
                   </a:lnTo>
                 </a:path>
               </a:pathLst>
@@ -3946,309 +3946,309 @@
           </p:nvSpPr>
           <p:spPr>
             <a:xfrm>
-              <a:off x="1172049" y="4072062"/>
-              <a:ext cx="7090630" cy="1360133"/>
+              <a:off x="1172049" y="4056686"/>
+              <a:ext cx="7090630" cy="1377417"/>
             </a:xfrm>
             <a:custGeom>
               <a:avLst/>
               <a:pathLst>
-                <a:path w="7090630" h="1360133">
+                <a:path w="7090630" h="1377417">
                   <a:moveTo>
-                    <a:pt x="7090630" y="1360133"/>
+                    <a:pt x="7090630" y="1377417"/>
                   </a:moveTo>
                   <a:lnTo>
-                    <a:pt x="7019007" y="1355767"/>
-                  </a:lnTo>
-                  <a:lnTo>
-                    <a:pt x="6947385" y="1351249"/>
-                  </a:lnTo>
-                  <a:lnTo>
-                    <a:pt x="6875762" y="1346573"/>
-                  </a:lnTo>
-                  <a:lnTo>
-                    <a:pt x="6804139" y="1341734"/>
-                  </a:lnTo>
-                  <a:lnTo>
-                    <a:pt x="6732517" y="1336726"/>
-                  </a:lnTo>
-                  <a:lnTo>
-                    <a:pt x="6660894" y="1331543"/>
-                  </a:lnTo>
-                  <a:lnTo>
-                    <a:pt x="6589272" y="1326179"/>
-                  </a:lnTo>
-                  <a:lnTo>
-                    <a:pt x="6517649" y="1320628"/>
-                  </a:lnTo>
-                  <a:lnTo>
-                    <a:pt x="6446027" y="1314883"/>
-                  </a:lnTo>
-                  <a:lnTo>
-                    <a:pt x="6374404" y="1308938"/>
-                  </a:lnTo>
-                  <a:lnTo>
-                    <a:pt x="6302782" y="1302785"/>
-                  </a:lnTo>
-                  <a:lnTo>
-                    <a:pt x="6231159" y="1296417"/>
-                  </a:lnTo>
-                  <a:lnTo>
-                    <a:pt x="6159537" y="1289827"/>
-                  </a:lnTo>
-                  <a:lnTo>
-                    <a:pt x="6087914" y="1283007"/>
-                  </a:lnTo>
-                  <a:lnTo>
-                    <a:pt x="6016292" y="1275948"/>
-                  </a:lnTo>
-                  <a:lnTo>
-                    <a:pt x="5944669" y="1268643"/>
-                  </a:lnTo>
-                  <a:lnTo>
-                    <a:pt x="5873047" y="1261084"/>
-                  </a:lnTo>
-                  <a:lnTo>
-                    <a:pt x="5801424" y="1253260"/>
-                  </a:lnTo>
-                  <a:lnTo>
-                    <a:pt x="5729802" y="1245163"/>
-                  </a:lnTo>
-                  <a:lnTo>
-                    <a:pt x="5658179" y="1236784"/>
-                  </a:lnTo>
-                  <a:lnTo>
-                    <a:pt x="5586557" y="1228112"/>
-                  </a:lnTo>
-                  <a:lnTo>
-                    <a:pt x="5514934" y="1219137"/>
-                  </a:lnTo>
-                  <a:lnTo>
-                    <a:pt x="5443311" y="1209849"/>
-                  </a:lnTo>
-                  <a:lnTo>
-                    <a:pt x="5371689" y="1200237"/>
-                  </a:lnTo>
-                  <a:lnTo>
-                    <a:pt x="5300066" y="1190289"/>
-                  </a:lnTo>
-                  <a:lnTo>
-                    <a:pt x="5228444" y="1179994"/>
-                  </a:lnTo>
-                  <a:lnTo>
-                    <a:pt x="5156821" y="1169339"/>
-                  </a:lnTo>
-                  <a:lnTo>
-                    <a:pt x="5085199" y="1158312"/>
-                  </a:lnTo>
-                  <a:lnTo>
-                    <a:pt x="5013576" y="1146901"/>
-                  </a:lnTo>
-                  <a:lnTo>
-                    <a:pt x="4941954" y="1135091"/>
-                  </a:lnTo>
-                  <a:lnTo>
-                    <a:pt x="4870331" y="1122869"/>
-                  </a:lnTo>
-                  <a:lnTo>
-                    <a:pt x="4798709" y="1110220"/>
-                  </a:lnTo>
-                  <a:lnTo>
-                    <a:pt x="4727086" y="1097129"/>
-                  </a:lnTo>
-                  <a:lnTo>
-                    <a:pt x="4655464" y="1083582"/>
-                  </a:lnTo>
-                  <a:lnTo>
-                    <a:pt x="4583841" y="1069561"/>
-                  </a:lnTo>
-                  <a:lnTo>
-                    <a:pt x="4512219" y="1055051"/>
-                  </a:lnTo>
-                  <a:lnTo>
-                    <a:pt x="4440596" y="1040035"/>
-                  </a:lnTo>
-                  <a:lnTo>
-                    <a:pt x="4368974" y="1024494"/>
-                  </a:lnTo>
-                  <a:lnTo>
-                    <a:pt x="4297351" y="1008411"/>
-                  </a:lnTo>
-                  <a:lnTo>
-                    <a:pt x="4225729" y="991766"/>
-                  </a:lnTo>
-                  <a:lnTo>
-                    <a:pt x="4154106" y="974540"/>
-                  </a:lnTo>
-                  <a:lnTo>
-                    <a:pt x="4082483" y="956713"/>
-                  </a:lnTo>
-                  <a:lnTo>
-                    <a:pt x="4010861" y="938264"/>
-                  </a:lnTo>
-                  <a:lnTo>
-                    <a:pt x="3939238" y="919170"/>
-                  </a:lnTo>
-                  <a:lnTo>
-                    <a:pt x="3867616" y="899410"/>
-                  </a:lnTo>
-                  <a:lnTo>
-                    <a:pt x="3795993" y="878960"/>
-                  </a:lnTo>
-                  <a:lnTo>
-                    <a:pt x="3724371" y="857796"/>
-                  </a:lnTo>
-                  <a:lnTo>
-                    <a:pt x="3652748" y="835893"/>
-                  </a:lnTo>
-                  <a:lnTo>
-                    <a:pt x="3581126" y="813225"/>
-                  </a:lnTo>
-                  <a:lnTo>
-                    <a:pt x="3509503" y="789766"/>
-                  </a:lnTo>
-                  <a:lnTo>
-                    <a:pt x="3437881" y="765488"/>
-                  </a:lnTo>
-                  <a:lnTo>
-                    <a:pt x="3366258" y="740363"/>
-                  </a:lnTo>
-                  <a:lnTo>
-                    <a:pt x="3294636" y="714360"/>
-                  </a:lnTo>
-                  <a:lnTo>
-                    <a:pt x="3223013" y="687450"/>
-                  </a:lnTo>
-                  <a:lnTo>
-                    <a:pt x="3151391" y="659600"/>
-                  </a:lnTo>
-                  <a:lnTo>
-                    <a:pt x="3079768" y="646157"/>
-                  </a:lnTo>
-                  <a:lnTo>
-                    <a:pt x="3008146" y="634940"/>
-                  </a:lnTo>
-                  <a:lnTo>
-                    <a:pt x="2936523" y="623573"/>
-                  </a:lnTo>
-                  <a:lnTo>
-                    <a:pt x="2864901" y="612054"/>
-                  </a:lnTo>
-                  <a:lnTo>
-                    <a:pt x="2793278" y="600382"/>
-                  </a:lnTo>
-                  <a:lnTo>
-                    <a:pt x="2721655" y="588553"/>
-                  </a:lnTo>
-                  <a:lnTo>
-                    <a:pt x="2650033" y="576566"/>
-                  </a:lnTo>
-                  <a:lnTo>
-                    <a:pt x="2578410" y="564419"/>
-                  </a:lnTo>
-                  <a:lnTo>
-                    <a:pt x="2506788" y="552109"/>
-                  </a:lnTo>
-                  <a:lnTo>
-                    <a:pt x="2435165" y="539635"/>
-                  </a:lnTo>
-                  <a:lnTo>
-                    <a:pt x="2363543" y="526994"/>
-                  </a:lnTo>
-                  <a:lnTo>
-                    <a:pt x="2291920" y="514184"/>
-                  </a:lnTo>
-                  <a:lnTo>
-                    <a:pt x="2220298" y="501203"/>
-                  </a:lnTo>
-                  <a:lnTo>
-                    <a:pt x="2148675" y="488049"/>
-                  </a:lnTo>
-                  <a:lnTo>
-                    <a:pt x="2077053" y="474718"/>
-                  </a:lnTo>
-                  <a:lnTo>
-                    <a:pt x="2005430" y="461209"/>
-                  </a:lnTo>
-                  <a:lnTo>
-                    <a:pt x="1933808" y="447520"/>
-                  </a:lnTo>
-                  <a:lnTo>
-                    <a:pt x="1862185" y="433648"/>
-                  </a:lnTo>
-                  <a:lnTo>
-                    <a:pt x="1790563" y="419590"/>
-                  </a:lnTo>
-                  <a:lnTo>
-                    <a:pt x="1718940" y="405344"/>
-                  </a:lnTo>
-                  <a:lnTo>
-                    <a:pt x="1647318" y="390908"/>
-                  </a:lnTo>
-                  <a:lnTo>
-                    <a:pt x="1575695" y="376279"/>
-                  </a:lnTo>
-                  <a:lnTo>
-                    <a:pt x="1504073" y="361454"/>
-                  </a:lnTo>
-                  <a:lnTo>
-                    <a:pt x="1432450" y="346431"/>
-                  </a:lnTo>
-                  <a:lnTo>
-                    <a:pt x="1360827" y="331207"/>
-                  </a:lnTo>
-                  <a:lnTo>
-                    <a:pt x="1289205" y="315780"/>
-                  </a:lnTo>
-                  <a:lnTo>
-                    <a:pt x="1217582" y="300146"/>
-                  </a:lnTo>
-                  <a:lnTo>
-                    <a:pt x="1145960" y="284304"/>
-                  </a:lnTo>
-                  <a:lnTo>
-                    <a:pt x="1074337" y="268249"/>
-                  </a:lnTo>
-                  <a:lnTo>
-                    <a:pt x="1002715" y="251980"/>
-                  </a:lnTo>
-                  <a:lnTo>
-                    <a:pt x="931092" y="235494"/>
-                  </a:lnTo>
-                  <a:lnTo>
-                    <a:pt x="859470" y="218787"/>
-                  </a:lnTo>
-                  <a:lnTo>
-                    <a:pt x="787847" y="201857"/>
-                  </a:lnTo>
-                  <a:lnTo>
-                    <a:pt x="716225" y="184700"/>
-                  </a:lnTo>
-                  <a:lnTo>
-                    <a:pt x="644602" y="167314"/>
-                  </a:lnTo>
-                  <a:lnTo>
-                    <a:pt x="572980" y="149696"/>
-                  </a:lnTo>
-                  <a:lnTo>
-                    <a:pt x="501357" y="131842"/>
-                  </a:lnTo>
-                  <a:lnTo>
-                    <a:pt x="429735" y="113749"/>
-                  </a:lnTo>
-                  <a:lnTo>
-                    <a:pt x="358112" y="95415"/>
-                  </a:lnTo>
-                  <a:lnTo>
-                    <a:pt x="286490" y="76835"/>
-                  </a:lnTo>
-                  <a:lnTo>
-                    <a:pt x="214867" y="58007"/>
-                  </a:lnTo>
-                  <a:lnTo>
-                    <a:pt x="143245" y="38927"/>
-                  </a:lnTo>
-                  <a:lnTo>
-                    <a:pt x="71622" y="19593"/>
+                    <a:pt x="7019007" y="1373083"/>
+                  </a:lnTo>
+                  <a:lnTo>
+                    <a:pt x="6947385" y="1368595"/>
+                  </a:lnTo>
+                  <a:lnTo>
+                    <a:pt x="6875762" y="1363949"/>
+                  </a:lnTo>
+                  <a:lnTo>
+                    <a:pt x="6804139" y="1359140"/>
+                  </a:lnTo>
+                  <a:lnTo>
+                    <a:pt x="6732517" y="1354162"/>
+                  </a:lnTo>
+                  <a:lnTo>
+                    <a:pt x="6660894" y="1349008"/>
+                  </a:lnTo>
+                  <a:lnTo>
+                    <a:pt x="6589272" y="1343673"/>
+                  </a:lnTo>
+                  <a:lnTo>
+                    <a:pt x="6517649" y="1338150"/>
+                  </a:lnTo>
+                  <a:lnTo>
+                    <a:pt x="6446027" y="1332433"/>
+                  </a:lnTo>
+                  <a:lnTo>
+                    <a:pt x="6374404" y="1326515"/>
+                  </a:lnTo>
+                  <a:lnTo>
+                    <a:pt x="6302782" y="1320388"/>
+                  </a:lnTo>
+                  <a:lnTo>
+                    <a:pt x="6231159" y="1314045"/>
+                  </a:lnTo>
+                  <a:lnTo>
+                    <a:pt x="6159537" y="1307480"/>
+                  </a:lnTo>
+                  <a:lnTo>
+                    <a:pt x="6087914" y="1300683"/>
+                  </a:lnTo>
+                  <a:lnTo>
+                    <a:pt x="6016292" y="1293646"/>
+                  </a:lnTo>
+                  <a:lnTo>
+                    <a:pt x="5944669" y="1286363"/>
+                  </a:lnTo>
+                  <a:lnTo>
+                    <a:pt x="5873047" y="1278822"/>
+                  </a:lnTo>
+                  <a:lnTo>
+                    <a:pt x="5801424" y="1271017"/>
+                  </a:lnTo>
+                  <a:lnTo>
+                    <a:pt x="5729802" y="1262936"/>
+                  </a:lnTo>
+                  <a:lnTo>
+                    <a:pt x="5658179" y="1254571"/>
+                  </a:lnTo>
+                  <a:lnTo>
+                    <a:pt x="5586557" y="1245912"/>
+                  </a:lnTo>
+                  <a:lnTo>
+                    <a:pt x="5514934" y="1236948"/>
+                  </a:lnTo>
+                  <a:lnTo>
+                    <a:pt x="5443311" y="1227668"/>
+                  </a:lnTo>
+                  <a:lnTo>
+                    <a:pt x="5371689" y="1218061"/>
+                  </a:lnTo>
+                  <a:lnTo>
+                    <a:pt x="5300066" y="1208117"/>
+                  </a:lnTo>
+                  <a:lnTo>
+                    <a:pt x="5228444" y="1197822"/>
+                  </a:lnTo>
+                  <a:lnTo>
+                    <a:pt x="5156821" y="1187165"/>
+                  </a:lnTo>
+                  <a:lnTo>
+                    <a:pt x="5085199" y="1176133"/>
+                  </a:lnTo>
+                  <a:lnTo>
+                    <a:pt x="5013576" y="1164712"/>
+                  </a:lnTo>
+                  <a:lnTo>
+                    <a:pt x="4941954" y="1152889"/>
+                  </a:lnTo>
+                  <a:lnTo>
+                    <a:pt x="4870331" y="1140651"/>
+                  </a:lnTo>
+                  <a:lnTo>
+                    <a:pt x="4798709" y="1127981"/>
+                  </a:lnTo>
+                  <a:lnTo>
+                    <a:pt x="4727086" y="1114865"/>
+                  </a:lnTo>
+                  <a:lnTo>
+                    <a:pt x="4655464" y="1101288"/>
+                  </a:lnTo>
+                  <a:lnTo>
+                    <a:pt x="4583841" y="1087233"/>
+                  </a:lnTo>
+                  <a:lnTo>
+                    <a:pt x="4512219" y="1072683"/>
+                  </a:lnTo>
+                  <a:lnTo>
+                    <a:pt x="4440596" y="1057621"/>
+                  </a:lnTo>
+                  <a:lnTo>
+                    <a:pt x="4368974" y="1042028"/>
+                  </a:lnTo>
+                  <a:lnTo>
+                    <a:pt x="4297351" y="1025887"/>
+                  </a:lnTo>
+                  <a:lnTo>
+                    <a:pt x="4225729" y="1009177"/>
+                  </a:lnTo>
+                  <a:lnTo>
+                    <a:pt x="4154106" y="991880"/>
+                  </a:lnTo>
+                  <a:lnTo>
+                    <a:pt x="4082483" y="973973"/>
+                  </a:lnTo>
+                  <a:lnTo>
+                    <a:pt x="4010861" y="955436"/>
+                  </a:lnTo>
+                  <a:lnTo>
+                    <a:pt x="3939238" y="936246"/>
+                  </a:lnTo>
+                  <a:lnTo>
+                    <a:pt x="3867616" y="916381"/>
+                  </a:lnTo>
+                  <a:lnTo>
+                    <a:pt x="3795993" y="895817"/>
+                  </a:lnTo>
+                  <a:lnTo>
+                    <a:pt x="3724371" y="874529"/>
+                  </a:lnTo>
+                  <a:lnTo>
+                    <a:pt x="3652748" y="852491"/>
+                  </a:lnTo>
+                  <a:lnTo>
+                    <a:pt x="3581126" y="829678"/>
+                  </a:lnTo>
+                  <a:lnTo>
+                    <a:pt x="3509503" y="806061"/>
+                  </a:lnTo>
+                  <a:lnTo>
+                    <a:pt x="3437881" y="781613"/>
+                  </a:lnTo>
+                  <a:lnTo>
+                    <a:pt x="3366258" y="756305"/>
+                  </a:lnTo>
+                  <a:lnTo>
+                    <a:pt x="3294636" y="730106"/>
+                  </a:lnTo>
+                  <a:lnTo>
+                    <a:pt x="3223013" y="702984"/>
+                  </a:lnTo>
+                  <a:lnTo>
+                    <a:pt x="3151391" y="674908"/>
+                  </a:lnTo>
+                  <a:lnTo>
+                    <a:pt x="3079768" y="661324"/>
+                  </a:lnTo>
+                  <a:lnTo>
+                    <a:pt x="3008146" y="649906"/>
+                  </a:lnTo>
+                  <a:lnTo>
+                    <a:pt x="2936523" y="638332"/>
+                  </a:lnTo>
+                  <a:lnTo>
+                    <a:pt x="2864901" y="626601"/>
+                  </a:lnTo>
+                  <a:lnTo>
+                    <a:pt x="2793278" y="614710"/>
+                  </a:lnTo>
+                  <a:lnTo>
+                    <a:pt x="2721655" y="602657"/>
+                  </a:lnTo>
+                  <a:lnTo>
+                    <a:pt x="2650033" y="590440"/>
+                  </a:lnTo>
+                  <a:lnTo>
+                    <a:pt x="2578410" y="578058"/>
+                  </a:lnTo>
+                  <a:lnTo>
+                    <a:pt x="2506788" y="565506"/>
+                  </a:lnTo>
+                  <a:lnTo>
+                    <a:pt x="2435165" y="552784"/>
+                  </a:lnTo>
+                  <a:lnTo>
+                    <a:pt x="2363543" y="539889"/>
+                  </a:lnTo>
+                  <a:lnTo>
+                    <a:pt x="2291920" y="526818"/>
+                  </a:lnTo>
+                  <a:lnTo>
+                    <a:pt x="2220298" y="513570"/>
+                  </a:lnTo>
+                  <a:lnTo>
+                    <a:pt x="2148675" y="500141"/>
+                  </a:lnTo>
+                  <a:lnTo>
+                    <a:pt x="2077053" y="486530"/>
+                  </a:lnTo>
+                  <a:lnTo>
+                    <a:pt x="2005430" y="472733"/>
+                  </a:lnTo>
+                  <a:lnTo>
+                    <a:pt x="1933808" y="458749"/>
+                  </a:lnTo>
+                  <a:lnTo>
+                    <a:pt x="1862185" y="444574"/>
+                  </a:lnTo>
+                  <a:lnTo>
+                    <a:pt x="1790563" y="430207"/>
+                  </a:lnTo>
+                  <a:lnTo>
+                    <a:pt x="1718940" y="415644"/>
+                  </a:lnTo>
+                  <a:lnTo>
+                    <a:pt x="1647318" y="400883"/>
+                  </a:lnTo>
+                  <a:lnTo>
+                    <a:pt x="1575695" y="385921"/>
+                  </a:lnTo>
+                  <a:lnTo>
+                    <a:pt x="1504073" y="370755"/>
+                  </a:lnTo>
+                  <a:lnTo>
+                    <a:pt x="1432450" y="355384"/>
+                  </a:lnTo>
+                  <a:lnTo>
+                    <a:pt x="1360827" y="339803"/>
+                  </a:lnTo>
+                  <a:lnTo>
+                    <a:pt x="1289205" y="324010"/>
+                  </a:lnTo>
+                  <a:lnTo>
+                    <a:pt x="1217582" y="308002"/>
+                  </a:lnTo>
+                  <a:lnTo>
+                    <a:pt x="1145960" y="291776"/>
+                  </a:lnTo>
+                  <a:lnTo>
+                    <a:pt x="1074337" y="275330"/>
+                  </a:lnTo>
+                  <a:lnTo>
+                    <a:pt x="1002715" y="258660"/>
+                  </a:lnTo>
+                  <a:lnTo>
+                    <a:pt x="931092" y="241763"/>
+                  </a:lnTo>
+                  <a:lnTo>
+                    <a:pt x="859470" y="224636"/>
+                  </a:lnTo>
+                  <a:lnTo>
+                    <a:pt x="787847" y="207276"/>
+                  </a:lnTo>
+                  <a:lnTo>
+                    <a:pt x="716225" y="189680"/>
+                  </a:lnTo>
+                  <a:lnTo>
+                    <a:pt x="644602" y="171844"/>
+                  </a:lnTo>
+                  <a:lnTo>
+                    <a:pt x="572980" y="153766"/>
+                  </a:lnTo>
+                  <a:lnTo>
+                    <a:pt x="501357" y="135442"/>
+                  </a:lnTo>
+                  <a:lnTo>
+                    <a:pt x="429735" y="116869"/>
+                  </a:lnTo>
+                  <a:lnTo>
+                    <a:pt x="358112" y="98043"/>
+                  </a:lnTo>
+                  <a:lnTo>
+                    <a:pt x="286490" y="78960"/>
+                  </a:lnTo>
+                  <a:lnTo>
+                    <a:pt x="214867" y="59618"/>
+                  </a:lnTo>
+                  <a:lnTo>
+                    <a:pt x="143245" y="40013"/>
+                  </a:lnTo>
+                  <a:lnTo>
+                    <a:pt x="71622" y="20142"/>
                   </a:lnTo>
                   <a:lnTo>
                     <a:pt x="0" y="0"/>
@@ -4271,312 +4271,312 @@
           </p:nvSpPr>
           <p:spPr>
             <a:xfrm>
-              <a:off x="1172049" y="3201449"/>
-              <a:ext cx="7090630" cy="2132471"/>
+              <a:off x="1172049" y="3174500"/>
+              <a:ext cx="7090630" cy="2162548"/>
             </a:xfrm>
             <a:custGeom>
               <a:avLst/>
               <a:pathLst>
-                <a:path w="7090630" h="2132471">
+                <a:path w="7090630" h="2162548">
                   <a:moveTo>
                     <a:pt x="0" y="0"/>
                   </a:moveTo>
                   <a:lnTo>
-                    <a:pt x="71622" y="55401"/>
-                  </a:lnTo>
-                  <a:lnTo>
-                    <a:pt x="143245" y="109499"/>
-                  </a:lnTo>
-                  <a:lnTo>
-                    <a:pt x="214867" y="162325"/>
-                  </a:lnTo>
-                  <a:lnTo>
-                    <a:pt x="286490" y="213909"/>
-                  </a:lnTo>
-                  <a:lnTo>
-                    <a:pt x="358112" y="264280"/>
-                  </a:lnTo>
-                  <a:lnTo>
-                    <a:pt x="429735" y="313466"/>
-                  </a:lnTo>
-                  <a:lnTo>
-                    <a:pt x="501357" y="361495"/>
-                  </a:lnTo>
-                  <a:lnTo>
-                    <a:pt x="572980" y="408395"/>
-                  </a:lnTo>
-                  <a:lnTo>
-                    <a:pt x="644602" y="454192"/>
-                  </a:lnTo>
-                  <a:lnTo>
-                    <a:pt x="716225" y="498912"/>
-                  </a:lnTo>
-                  <a:lnTo>
-                    <a:pt x="787847" y="542580"/>
-                  </a:lnTo>
-                  <a:lnTo>
-                    <a:pt x="859470" y="585222"/>
-                  </a:lnTo>
-                  <a:lnTo>
-                    <a:pt x="931092" y="626860"/>
-                  </a:lnTo>
-                  <a:lnTo>
-                    <a:pt x="1002715" y="667520"/>
-                  </a:lnTo>
-                  <a:lnTo>
-                    <a:pt x="1074337" y="707223"/>
-                  </a:lnTo>
-                  <a:lnTo>
-                    <a:pt x="1145960" y="745992"/>
-                  </a:lnTo>
-                  <a:lnTo>
-                    <a:pt x="1217582" y="783850"/>
-                  </a:lnTo>
-                  <a:lnTo>
-                    <a:pt x="1289205" y="820817"/>
-                  </a:lnTo>
-                  <a:lnTo>
-                    <a:pt x="1360827" y="856916"/>
-                  </a:lnTo>
-                  <a:lnTo>
-                    <a:pt x="1432450" y="892165"/>
-                  </a:lnTo>
-                  <a:lnTo>
-                    <a:pt x="1504073" y="926585"/>
-                  </a:lnTo>
-                  <a:lnTo>
-                    <a:pt x="1575695" y="960196"/>
-                  </a:lnTo>
-                  <a:lnTo>
-                    <a:pt x="1647318" y="993016"/>
-                  </a:lnTo>
-                  <a:lnTo>
-                    <a:pt x="1718940" y="1025065"/>
-                  </a:lnTo>
-                  <a:lnTo>
-                    <a:pt x="1790563" y="1056359"/>
-                  </a:lnTo>
-                  <a:lnTo>
-                    <a:pt x="1862185" y="1086918"/>
-                  </a:lnTo>
-                  <a:lnTo>
-                    <a:pt x="1933808" y="1116758"/>
-                  </a:lnTo>
-                  <a:lnTo>
-                    <a:pt x="2005430" y="1145897"/>
-                  </a:lnTo>
-                  <a:lnTo>
-                    <a:pt x="2077053" y="1174350"/>
-                  </a:lnTo>
-                  <a:lnTo>
-                    <a:pt x="2148675" y="1202134"/>
-                  </a:lnTo>
-                  <a:lnTo>
-                    <a:pt x="2220298" y="1229265"/>
-                  </a:lnTo>
-                  <a:lnTo>
-                    <a:pt x="2291920" y="1255757"/>
-                  </a:lnTo>
-                  <a:lnTo>
-                    <a:pt x="2363543" y="1281627"/>
-                  </a:lnTo>
-                  <a:lnTo>
-                    <a:pt x="2435165" y="1306888"/>
-                  </a:lnTo>
-                  <a:lnTo>
-                    <a:pt x="2506788" y="1331556"/>
-                  </a:lnTo>
-                  <a:lnTo>
-                    <a:pt x="2578410" y="1355643"/>
-                  </a:lnTo>
-                  <a:lnTo>
-                    <a:pt x="2650033" y="1379163"/>
-                  </a:lnTo>
-                  <a:lnTo>
-                    <a:pt x="2721655" y="1402131"/>
-                  </a:lnTo>
-                  <a:lnTo>
-                    <a:pt x="2793278" y="1424558"/>
-                  </a:lnTo>
-                  <a:lnTo>
-                    <a:pt x="2864901" y="1446458"/>
-                  </a:lnTo>
-                  <a:lnTo>
-                    <a:pt x="2936523" y="1467843"/>
-                  </a:lnTo>
-                  <a:lnTo>
-                    <a:pt x="3008146" y="1488725"/>
-                  </a:lnTo>
-                  <a:lnTo>
-                    <a:pt x="3079768" y="1509116"/>
-                  </a:lnTo>
-                  <a:lnTo>
-                    <a:pt x="3151391" y="1529027"/>
-                  </a:lnTo>
-                  <a:lnTo>
-                    <a:pt x="3223013" y="1548471"/>
-                  </a:lnTo>
-                  <a:lnTo>
-                    <a:pt x="3294636" y="1567456"/>
-                  </a:lnTo>
-                  <a:lnTo>
-                    <a:pt x="3366258" y="1585996"/>
-                  </a:lnTo>
-                  <a:lnTo>
-                    <a:pt x="3437881" y="1604099"/>
-                  </a:lnTo>
-                  <a:lnTo>
-                    <a:pt x="3509503" y="1621777"/>
-                  </a:lnTo>
-                  <a:lnTo>
-                    <a:pt x="3581126" y="1639039"/>
-                  </a:lnTo>
-                  <a:lnTo>
-                    <a:pt x="3652748" y="1655895"/>
-                  </a:lnTo>
-                  <a:lnTo>
-                    <a:pt x="3724371" y="1672355"/>
-                  </a:lnTo>
-                  <a:lnTo>
-                    <a:pt x="3795993" y="1688427"/>
-                  </a:lnTo>
-                  <a:lnTo>
-                    <a:pt x="3867616" y="1704122"/>
-                  </a:lnTo>
-                  <a:lnTo>
-                    <a:pt x="3939238" y="1719447"/>
-                  </a:lnTo>
-                  <a:lnTo>
-                    <a:pt x="4010861" y="1734412"/>
-                  </a:lnTo>
-                  <a:lnTo>
-                    <a:pt x="4082483" y="1749025"/>
-                  </a:lnTo>
-                  <a:lnTo>
-                    <a:pt x="4154106" y="1763295"/>
-                  </a:lnTo>
-                  <a:lnTo>
-                    <a:pt x="4225729" y="1777229"/>
-                  </a:lnTo>
-                  <a:lnTo>
-                    <a:pt x="4297351" y="1790835"/>
-                  </a:lnTo>
-                  <a:lnTo>
-                    <a:pt x="4368974" y="1804121"/>
-                  </a:lnTo>
-                  <a:lnTo>
-                    <a:pt x="4440596" y="1817095"/>
-                  </a:lnTo>
-                  <a:lnTo>
-                    <a:pt x="4512219" y="1829764"/>
-                  </a:lnTo>
-                  <a:lnTo>
-                    <a:pt x="4583841" y="1842135"/>
-                  </a:lnTo>
-                  <a:lnTo>
-                    <a:pt x="4655464" y="1854214"/>
-                  </a:lnTo>
-                  <a:lnTo>
-                    <a:pt x="4727086" y="1866010"/>
-                  </a:lnTo>
-                  <a:lnTo>
-                    <a:pt x="4798709" y="1877528"/>
-                  </a:lnTo>
-                  <a:lnTo>
-                    <a:pt x="4870331" y="1888776"/>
-                  </a:lnTo>
-                  <a:lnTo>
-                    <a:pt x="4941954" y="1899759"/>
-                  </a:lnTo>
-                  <a:lnTo>
-                    <a:pt x="5013576" y="1910484"/>
-                  </a:lnTo>
-                  <a:lnTo>
-                    <a:pt x="5085199" y="1920956"/>
-                  </a:lnTo>
-                  <a:lnTo>
-                    <a:pt x="5156821" y="1931182"/>
-                  </a:lnTo>
-                  <a:lnTo>
-                    <a:pt x="5228444" y="1941168"/>
-                  </a:lnTo>
-                  <a:lnTo>
-                    <a:pt x="5300066" y="1950919"/>
-                  </a:lnTo>
-                  <a:lnTo>
-                    <a:pt x="5371689" y="1960440"/>
-                  </a:lnTo>
-                  <a:lnTo>
-                    <a:pt x="5443311" y="1969738"/>
-                  </a:lnTo>
-                  <a:lnTo>
-                    <a:pt x="5514934" y="1978817"/>
-                  </a:lnTo>
-                  <a:lnTo>
-                    <a:pt x="5586557" y="1987683"/>
-                  </a:lnTo>
-                  <a:lnTo>
-                    <a:pt x="5658179" y="1996340"/>
-                  </a:lnTo>
-                  <a:lnTo>
-                    <a:pt x="5729802" y="2004793"/>
-                  </a:lnTo>
-                  <a:lnTo>
-                    <a:pt x="5801424" y="2013048"/>
-                  </a:lnTo>
-                  <a:lnTo>
-                    <a:pt x="5873047" y="2021108"/>
-                  </a:lnTo>
-                  <a:lnTo>
-                    <a:pt x="5944669" y="2028979"/>
-                  </a:lnTo>
-                  <a:lnTo>
-                    <a:pt x="6016292" y="2036665"/>
-                  </a:lnTo>
-                  <a:lnTo>
-                    <a:pt x="6087914" y="2044170"/>
-                  </a:lnTo>
-                  <a:lnTo>
-                    <a:pt x="6159537" y="2051499"/>
-                  </a:lnTo>
-                  <a:lnTo>
-                    <a:pt x="6231159" y="2058655"/>
-                  </a:lnTo>
-                  <a:lnTo>
-                    <a:pt x="6302782" y="2065643"/>
-                  </a:lnTo>
-                  <a:lnTo>
-                    <a:pt x="6374404" y="2072466"/>
-                  </a:lnTo>
-                  <a:lnTo>
-                    <a:pt x="6446027" y="2079130"/>
-                  </a:lnTo>
-                  <a:lnTo>
-                    <a:pt x="6517649" y="2085636"/>
-                  </a:lnTo>
-                  <a:lnTo>
-                    <a:pt x="6589272" y="2091989"/>
-                  </a:lnTo>
-                  <a:lnTo>
-                    <a:pt x="6660894" y="2098193"/>
-                  </a:lnTo>
-                  <a:lnTo>
-                    <a:pt x="6732517" y="2104252"/>
-                  </a:lnTo>
-                  <a:lnTo>
-                    <a:pt x="6804139" y="2110167"/>
-                  </a:lnTo>
-                  <a:lnTo>
-                    <a:pt x="6875762" y="2115944"/>
-                  </a:lnTo>
-                  <a:lnTo>
-                    <a:pt x="6947385" y="2121584"/>
-                  </a:lnTo>
-                  <a:lnTo>
-                    <a:pt x="7019007" y="2127092"/>
-                  </a:lnTo>
-                  <a:lnTo>
-                    <a:pt x="7090630" y="2132471"/>
+                    <a:pt x="71622" y="56633"/>
+                  </a:lnTo>
+                  <a:lnTo>
+                    <a:pt x="143245" y="111921"/>
+                  </a:lnTo>
+                  <a:lnTo>
+                    <a:pt x="214867" y="165894"/>
+                  </a:lnTo>
+                  <a:lnTo>
+                    <a:pt x="286490" y="218585"/>
+                  </a:lnTo>
+                  <a:lnTo>
+                    <a:pt x="358112" y="270023"/>
+                  </a:lnTo>
+                  <a:lnTo>
+                    <a:pt x="429735" y="320239"/>
+                  </a:lnTo>
+                  <a:lnTo>
+                    <a:pt x="501357" y="369261"/>
+                  </a:lnTo>
+                  <a:lnTo>
+                    <a:pt x="572980" y="417118"/>
+                  </a:lnTo>
+                  <a:lnTo>
+                    <a:pt x="644602" y="463838"/>
+                  </a:lnTo>
+                  <a:lnTo>
+                    <a:pt x="716225" y="509447"/>
+                  </a:lnTo>
+                  <a:lnTo>
+                    <a:pt x="787847" y="553972"/>
+                  </a:lnTo>
+                  <a:lnTo>
+                    <a:pt x="859470" y="597439"/>
+                  </a:lnTo>
+                  <a:lnTo>
+                    <a:pt x="931092" y="639872"/>
+                  </a:lnTo>
+                  <a:lnTo>
+                    <a:pt x="1002715" y="681298"/>
+                  </a:lnTo>
+                  <a:lnTo>
+                    <a:pt x="1074337" y="721738"/>
+                  </a:lnTo>
+                  <a:lnTo>
+                    <a:pt x="1145960" y="761217"/>
+                  </a:lnTo>
+                  <a:lnTo>
+                    <a:pt x="1217582" y="799758"/>
+                  </a:lnTo>
+                  <a:lnTo>
+                    <a:pt x="1289205" y="837383"/>
+                  </a:lnTo>
+                  <a:lnTo>
+                    <a:pt x="1360827" y="874114"/>
+                  </a:lnTo>
+                  <a:lnTo>
+                    <a:pt x="1432450" y="909971"/>
+                  </a:lnTo>
+                  <a:lnTo>
+                    <a:pt x="1504073" y="944977"/>
+                  </a:lnTo>
+                  <a:lnTo>
+                    <a:pt x="1575695" y="979150"/>
+                  </a:lnTo>
+                  <a:lnTo>
+                    <a:pt x="1647318" y="1012511"/>
+                  </a:lnTo>
+                  <a:lnTo>
+                    <a:pt x="1718940" y="1045079"/>
+                  </a:lnTo>
+                  <a:lnTo>
+                    <a:pt x="1790563" y="1076873"/>
+                  </a:lnTo>
+                  <a:lnTo>
+                    <a:pt x="1862185" y="1107911"/>
+                  </a:lnTo>
+                  <a:lnTo>
+                    <a:pt x="1933808" y="1138212"/>
+                  </a:lnTo>
+                  <a:lnTo>
+                    <a:pt x="2005430" y="1167792"/>
+                  </a:lnTo>
+                  <a:lnTo>
+                    <a:pt x="2077053" y="1196670"/>
+                  </a:lnTo>
+                  <a:lnTo>
+                    <a:pt x="2148675" y="1224861"/>
+                  </a:lnTo>
+                  <a:lnTo>
+                    <a:pt x="2220298" y="1252382"/>
+                  </a:lnTo>
+                  <a:lnTo>
+                    <a:pt x="2291920" y="1279249"/>
+                  </a:lnTo>
+                  <a:lnTo>
+                    <a:pt x="2363543" y="1305477"/>
+                  </a:lnTo>
+                  <a:lnTo>
+                    <a:pt x="2435165" y="1331082"/>
+                  </a:lnTo>
+                  <a:lnTo>
+                    <a:pt x="2506788" y="1356078"/>
+                  </a:lnTo>
+                  <a:lnTo>
+                    <a:pt x="2578410" y="1380480"/>
+                  </a:lnTo>
+                  <a:lnTo>
+                    <a:pt x="2650033" y="1404302"/>
+                  </a:lnTo>
+                  <a:lnTo>
+                    <a:pt x="2721655" y="1427558"/>
+                  </a:lnTo>
+                  <a:lnTo>
+                    <a:pt x="2793278" y="1450261"/>
+                  </a:lnTo>
+                  <a:lnTo>
+                    <a:pt x="2864901" y="1472425"/>
+                  </a:lnTo>
+                  <a:lnTo>
+                    <a:pt x="2936523" y="1494062"/>
+                  </a:lnTo>
+                  <a:lnTo>
+                    <a:pt x="3008146" y="1515184"/>
+                  </a:lnTo>
+                  <a:lnTo>
+                    <a:pt x="3079768" y="1535805"/>
+                  </a:lnTo>
+                  <a:lnTo>
+                    <a:pt x="3151391" y="1555935"/>
+                  </a:lnTo>
+                  <a:lnTo>
+                    <a:pt x="3223013" y="1575587"/>
+                  </a:lnTo>
+                  <a:lnTo>
+                    <a:pt x="3294636" y="1594772"/>
+                  </a:lnTo>
+                  <a:lnTo>
+                    <a:pt x="3366258" y="1613501"/>
+                  </a:lnTo>
+                  <a:lnTo>
+                    <a:pt x="3437881" y="1631784"/>
+                  </a:lnTo>
+                  <a:lnTo>
+                    <a:pt x="3509503" y="1649633"/>
+                  </a:lnTo>
+                  <a:lnTo>
+                    <a:pt x="3581126" y="1667058"/>
+                  </a:lnTo>
+                  <a:lnTo>
+                    <a:pt x="3652748" y="1684069"/>
+                  </a:lnTo>
+                  <a:lnTo>
+                    <a:pt x="3724371" y="1700675"/>
+                  </a:lnTo>
+                  <a:lnTo>
+                    <a:pt x="3795993" y="1716887"/>
+                  </a:lnTo>
+                  <a:lnTo>
+                    <a:pt x="3867616" y="1732713"/>
+                  </a:lnTo>
+                  <a:lnTo>
+                    <a:pt x="3939238" y="1748164"/>
+                  </a:lnTo>
+                  <a:lnTo>
+                    <a:pt x="4010861" y="1763247"/>
+                  </a:lnTo>
+                  <a:lnTo>
+                    <a:pt x="4082483" y="1777971"/>
+                  </a:lnTo>
+                  <a:lnTo>
+                    <a:pt x="4154106" y="1792345"/>
+                  </a:lnTo>
+                  <a:lnTo>
+                    <a:pt x="4225729" y="1806378"/>
+                  </a:lnTo>
+                  <a:lnTo>
+                    <a:pt x="4297351" y="1820078"/>
+                  </a:lnTo>
+                  <a:lnTo>
+                    <a:pt x="4368974" y="1833451"/>
+                  </a:lnTo>
+                  <a:lnTo>
+                    <a:pt x="4440596" y="1846507"/>
+                  </a:lnTo>
+                  <a:lnTo>
+                    <a:pt x="4512219" y="1859253"/>
+                  </a:lnTo>
+                  <a:lnTo>
+                    <a:pt x="4583841" y="1871695"/>
+                  </a:lnTo>
+                  <a:lnTo>
+                    <a:pt x="4655464" y="1883842"/>
+                  </a:lnTo>
+                  <a:lnTo>
+                    <a:pt x="4727086" y="1895700"/>
+                  </a:lnTo>
+                  <a:lnTo>
+                    <a:pt x="4798709" y="1907277"/>
+                  </a:lnTo>
+                  <a:lnTo>
+                    <a:pt x="4870331" y="1918578"/>
+                  </a:lnTo>
+                  <a:lnTo>
+                    <a:pt x="4941954" y="1929610"/>
+                  </a:lnTo>
+                  <a:lnTo>
+                    <a:pt x="5013576" y="1940381"/>
+                  </a:lnTo>
+                  <a:lnTo>
+                    <a:pt x="5085199" y="1950895"/>
+                  </a:lnTo>
+                  <a:lnTo>
+                    <a:pt x="5156821" y="1961159"/>
+                  </a:lnTo>
+                  <a:lnTo>
+                    <a:pt x="5228444" y="1971180"/>
+                  </a:lnTo>
+                  <a:lnTo>
+                    <a:pt x="5300066" y="1980962"/>
+                  </a:lnTo>
+                  <a:lnTo>
+                    <a:pt x="5371689" y="1990512"/>
+                  </a:lnTo>
+                  <a:lnTo>
+                    <a:pt x="5443311" y="1999834"/>
+                  </a:lnTo>
+                  <a:lnTo>
+                    <a:pt x="5514934" y="2008936"/>
+                  </a:lnTo>
+                  <a:lnTo>
+                    <a:pt x="5586557" y="2017821"/>
+                  </a:lnTo>
+                  <a:lnTo>
+                    <a:pt x="5658179" y="2026494"/>
+                  </a:lnTo>
+                  <a:lnTo>
+                    <a:pt x="5729802" y="2034962"/>
+                  </a:lnTo>
+                  <a:lnTo>
+                    <a:pt x="5801424" y="2043228"/>
+                  </a:lnTo>
+                  <a:lnTo>
+                    <a:pt x="5873047" y="2051298"/>
+                  </a:lnTo>
+                  <a:lnTo>
+                    <a:pt x="5944669" y="2059176"/>
+                  </a:lnTo>
+                  <a:lnTo>
+                    <a:pt x="6016292" y="2066867"/>
+                  </a:lnTo>
+                  <a:lnTo>
+                    <a:pt x="6087914" y="2074375"/>
+                  </a:lnTo>
+                  <a:lnTo>
+                    <a:pt x="6159537" y="2081704"/>
+                  </a:lnTo>
+                  <a:lnTo>
+                    <a:pt x="6231159" y="2088859"/>
+                  </a:lnTo>
+                  <a:lnTo>
+                    <a:pt x="6302782" y="2095845"/>
+                  </a:lnTo>
+                  <a:lnTo>
+                    <a:pt x="6374404" y="2102664"/>
+                  </a:lnTo>
+                  <a:lnTo>
+                    <a:pt x="6446027" y="2109321"/>
+                  </a:lnTo>
+                  <a:lnTo>
+                    <a:pt x="6517649" y="2115820"/>
+                  </a:lnTo>
+                  <a:lnTo>
+                    <a:pt x="6589272" y="2122164"/>
+                  </a:lnTo>
+                  <a:lnTo>
+                    <a:pt x="6660894" y="2128358"/>
+                  </a:lnTo>
+                  <a:lnTo>
+                    <a:pt x="6732517" y="2134404"/>
+                  </a:lnTo>
+                  <a:lnTo>
+                    <a:pt x="6804139" y="2140307"/>
+                  </a:lnTo>
+                  <a:lnTo>
+                    <a:pt x="6875762" y="2146070"/>
+                  </a:lnTo>
+                  <a:lnTo>
+                    <a:pt x="6947385" y="2151695"/>
+                  </a:lnTo>
+                  <a:lnTo>
+                    <a:pt x="7019007" y="2157187"/>
+                  </a:lnTo>
+                  <a:lnTo>
+                    <a:pt x="7090630" y="2162548"/>
                   </a:lnTo>
                 </a:path>
               </a:pathLst>
@@ -4648,7 +4648,7 @@
           </p:nvSpPr>
           <p:spPr>
             <a:xfrm>
-              <a:off x="4313661" y="2073503"/>
+              <a:off x="4313914" y="2073503"/>
               <a:ext cx="0" cy="3649639"/>
             </a:xfrm>
             <a:custGeom>
@@ -4921,7 +4921,7 @@
           </p:nvSpPr>
           <p:spPr>
             <a:xfrm>
-              <a:off x="2280620" y="5785772"/>
+              <a:off x="2281218" y="5785772"/>
               <a:ext cx="161574" cy="80101"/>
             </a:xfrm>
             <a:prstGeom prst="rect">
@@ -4967,7 +4967,7 @@
           </p:nvSpPr>
           <p:spPr>
             <a:xfrm>
-              <a:off x="4204872" y="5785772"/>
+              <a:off x="4203472" y="5785772"/>
               <a:ext cx="62179" cy="80101"/>
             </a:xfrm>
             <a:prstGeom prst="rect">
@@ -5013,7 +5013,7 @@
           </p:nvSpPr>
           <p:spPr>
             <a:xfrm>
-              <a:off x="6048338" y="5785772"/>
+              <a:off x="6044938" y="5785772"/>
               <a:ext cx="124358" cy="80101"/>
             </a:xfrm>
             <a:prstGeom prst="rect">
@@ -5059,7 +5059,7 @@
           </p:nvSpPr>
           <p:spPr>
             <a:xfrm>
-              <a:off x="7922893" y="5785772"/>
+              <a:off x="7917494" y="5785772"/>
               <a:ext cx="124358" cy="80101"/>
             </a:xfrm>
             <a:prstGeom prst="rect">
@@ -5230,7 +5230,7 @@
                   <a:latin typeface="Helvetica"/>
                   <a:cs typeface="Helvetica"/>
                 </a:rPr>
-                <a:t>subHR per 10 % decline: 1.37 (1.19-1.57), p_Bonf = &lt;0.001 (n = 6)  |  per IQR decline (Δ = 25.8 %): 2.24 (1.57-3.19)  |  IQR: [-10.7, 15.1] %</a:t>
+                <a:t>subHR per 10 % decline: 1.37 (1.19-1.57), p_Bonf = &lt;0.001 (n = 6)  |  per IQR decline (Δ = 25.8 %): 2.25 (1.58-3.21)  |  IQR: [-10.6, 15.2] %</a:t>
               </a:r>
             </a:p>
           </p:txBody>
